--- a/APLOS/POPResources/Templates/QRIDMainPlantHindi.pptx
+++ b/APLOS/POPResources/Templates/QRIDMainPlantHindi.pptx
@@ -11,10 +11,10 @@
     <p:handoutMasterId r:id="rId4"/>
   </p:handoutMasterIdLst>
   <p:sldIdLst>
-    <p:sldId id="257" r:id="rId2"/>
+    <p:sldId id="256" r:id="rId2"/>
   </p:sldIdLst>
   <p:sldSz cx="1947863" cy="3090863"/>
-  <p:notesSz cx="7104063" cy="10234613"/>
+  <p:notesSz cx="7010400" cy="9296400"/>
   <p:defaultTextStyle>
     <a:defPPr defTabSz="173043">
       <a:defRPr lang="en-US" dirty="0"/>
@@ -104,12 +104,12 @@
   <p:extLst>
     <p:ext uri="{EFAFB233-063F-42B5-8137-9DF3F51BA10A}">
       <p15:sldGuideLst xmlns:p15="http://schemas.microsoft.com/office/powerpoint/2012/main">
-        <p15:guide id="1" orient="horz" pos="974" userDrawn="1">
+        <p15:guide id="1" orient="horz" pos="974">
           <p15:clr>
             <a:srgbClr val="A4A3A4"/>
           </p15:clr>
         </p15:guide>
-        <p15:guide id="2" pos="614" userDrawn="1">
+        <p15:guide id="2" pos="614">
           <p15:clr>
             <a:srgbClr val="A4A3A4"/>
           </p15:clr>
@@ -124,9 +124,12 @@
 <p:handoutMaster xmlns:a="http://schemas.openxmlformats.org/drawingml/2006/main" xmlns:r="http://schemas.openxmlformats.org/officeDocument/2006/relationships" xmlns:p="http://schemas.openxmlformats.org/presentationml/2006/main">
   <p:cSld>
     <p:bg>
-      <p:bgRef idx="1001">
-        <a:schemeClr val="bg1"/>
-      </p:bgRef>
+      <p:bgPr>
+        <a:solidFill>
+          <a:schemeClr val="bg1"/>
+        </a:solidFill>
+        <a:effectLst/>
+      </p:bgPr>
     </p:bg>
     <p:spTree>
       <p:nvGrpSpPr>
@@ -144,13 +147,7 @@
       </p:grpSpPr>
       <p:sp>
         <p:nvSpPr>
-          <p:cNvPr id="2" name="Header Placeholder 1">
-            <a:extLst>
-              <a:ext uri="{FF2B5EF4-FFF2-40B4-BE49-F238E27FC236}">
-                <a16:creationId xmlns:a16="http://schemas.microsoft.com/office/drawing/2014/main" id="{C42291D2-79BB-4F94-87B9-BBF11653C264}"/>
-              </a:ext>
-            </a:extLst>
-          </p:cNvPr>
+          <p:cNvPr id="2" name="Header Placeholder 1"/>
           <p:cNvSpPr>
             <a:spLocks noGrp="1"/>
           </p:cNvSpPr>
@@ -158,36 +155,34 @@
             <p:ph type="hdr" sz="quarter"/>
           </p:nvPr>
         </p:nvSpPr>
-        <p:spPr>
+        <p:spPr bwMode="white">
           <a:xfrm>
             <a:off x="0" y="1"/>
-            <a:ext cx="3078427" cy="514100"/>
+            <a:ext cx="3037840" cy="466972"/>
           </a:xfrm>
           <a:prstGeom prst="rect">
             <a:avLst/>
           </a:prstGeom>
-        </p:spPr>
-        <p:txBody>
-          <a:bodyPr vert="horz" lIns="99075" tIns="49538" rIns="99075" bIns="49538" rtlCol="0"/>
+          <a:ln>
+            <a:headEnd type="none"/>
+            <a:tailEnd type="none"/>
+          </a:ln>
+        </p:spPr>
+        <p:txBody>
+          <a:bodyPr wrap="square" lIns="93170" tIns="46586" rIns="93170" bIns="46586"/>
           <a:lstStyle>
             <a:lvl1pPr algn="l">
-              <a:defRPr sz="1300"/>
+              <a:defRPr sz="1200" dirty="0"/>
             </a:lvl1pPr>
           </a:lstStyle>
           <a:p>
-            <a:endParaRPr lang="en-US"/>
-          </a:p>
-        </p:txBody>
-      </p:sp>
-      <p:sp>
-        <p:nvSpPr>
-          <p:cNvPr id="3" name="Date Placeholder 2">
-            <a:extLst>
-              <a:ext uri="{FF2B5EF4-FFF2-40B4-BE49-F238E27FC236}">
-                <a16:creationId xmlns:a16="http://schemas.microsoft.com/office/drawing/2014/main" id="{C63FC9E3-36E3-4AFB-928B-B5AEF250EA41}"/>
-              </a:ext>
-            </a:extLst>
-          </p:cNvPr>
+            <a:endParaRPr lang="en-US" dirty="0"/>
+          </a:p>
+        </p:txBody>
+      </p:sp>
+      <p:sp>
+        <p:nvSpPr>
+          <p:cNvPr id="3" name="Date Placeholder 2"/>
           <p:cNvSpPr>
             <a:spLocks noGrp="1"/>
           </p:cNvSpPr>
@@ -195,40 +190,38 @@
             <p:ph type="dt" sz="quarter" idx="1"/>
           </p:nvPr>
         </p:nvSpPr>
-        <p:spPr>
+        <p:spPr bwMode="white">
           <a:xfrm>
-            <a:off x="4024403" y="1"/>
-            <a:ext cx="3078427" cy="514100"/>
+            <a:off x="3971344" y="1"/>
+            <a:ext cx="3037840" cy="466972"/>
           </a:xfrm>
           <a:prstGeom prst="rect">
             <a:avLst/>
           </a:prstGeom>
-        </p:spPr>
-        <p:txBody>
-          <a:bodyPr vert="horz" lIns="99075" tIns="49538" rIns="99075" bIns="49538" rtlCol="0"/>
+          <a:ln>
+            <a:headEnd type="none"/>
+            <a:tailEnd type="none"/>
+          </a:ln>
+        </p:spPr>
+        <p:txBody>
+          <a:bodyPr wrap="square" lIns="93170" tIns="46586" rIns="93170" bIns="46586"/>
           <a:lstStyle>
             <a:lvl1pPr algn="r">
-              <a:defRPr sz="1300"/>
+              <a:defRPr sz="1200" dirty="0"/>
             </a:lvl1pPr>
           </a:lstStyle>
           <a:p>
             <a:fld id="{7B7E7892-5A32-4575-94C1-DE4A6525AA41}" type="datetimeFigureOut">
-              <a:rPr lang="en-US" smtClean="0"/>
-              <a:t>9/8/2021</a:t>
+              <a:rPr lang="en-US" dirty="0"/>
+              <a:t>9/30/2021</a:t>
             </a:fld>
-            <a:endParaRPr lang="en-US"/>
-          </a:p>
-        </p:txBody>
-      </p:sp>
-      <p:sp>
-        <p:nvSpPr>
-          <p:cNvPr id="4" name="Footer Placeholder 3">
-            <a:extLst>
-              <a:ext uri="{FF2B5EF4-FFF2-40B4-BE49-F238E27FC236}">
-                <a16:creationId xmlns:a16="http://schemas.microsoft.com/office/drawing/2014/main" id="{BE2A1C17-704D-4BC4-92E1-EBFCAA8AA92F}"/>
-              </a:ext>
-            </a:extLst>
-          </p:cNvPr>
+            <a:endParaRPr lang="en-US" dirty="0"/>
+          </a:p>
+        </p:txBody>
+      </p:sp>
+      <p:sp>
+        <p:nvSpPr>
+          <p:cNvPr id="4" name="Footer Placeholder 3"/>
           <p:cNvSpPr>
             <a:spLocks noGrp="1"/>
           </p:cNvSpPr>
@@ -236,36 +229,34 @@
             <p:ph type="ftr" sz="quarter" idx="2"/>
           </p:nvPr>
         </p:nvSpPr>
-        <p:spPr>
+        <p:spPr bwMode="white">
           <a:xfrm>
-            <a:off x="0" y="9720515"/>
-            <a:ext cx="3078427" cy="514099"/>
+            <a:off x="0" y="8829430"/>
+            <a:ext cx="3037840" cy="466971"/>
           </a:xfrm>
           <a:prstGeom prst="rect">
             <a:avLst/>
           </a:prstGeom>
-        </p:spPr>
-        <p:txBody>
-          <a:bodyPr vert="horz" lIns="99075" tIns="49538" rIns="99075" bIns="49538" rtlCol="0" anchor="b"/>
+          <a:ln>
+            <a:headEnd type="none"/>
+            <a:tailEnd type="none"/>
+          </a:ln>
+        </p:spPr>
+        <p:txBody>
+          <a:bodyPr wrap="square" lIns="93170" tIns="46586" rIns="93170" bIns="46586" anchor="b"/>
           <a:lstStyle>
             <a:lvl1pPr algn="l">
-              <a:defRPr sz="1300"/>
+              <a:defRPr sz="1200" dirty="0"/>
             </a:lvl1pPr>
           </a:lstStyle>
           <a:p>
-            <a:endParaRPr lang="en-US"/>
-          </a:p>
-        </p:txBody>
-      </p:sp>
-      <p:sp>
-        <p:nvSpPr>
-          <p:cNvPr id="5" name="Slide Number Placeholder 4">
-            <a:extLst>
-              <a:ext uri="{FF2B5EF4-FFF2-40B4-BE49-F238E27FC236}">
-                <a16:creationId xmlns:a16="http://schemas.microsoft.com/office/drawing/2014/main" id="{A86A4371-5D17-4637-BD19-8D5DBB00E666}"/>
-              </a:ext>
-            </a:extLst>
-          </p:cNvPr>
+            <a:endParaRPr lang="en-US" dirty="0"/>
+          </a:p>
+        </p:txBody>
+      </p:sp>
+      <p:sp>
+        <p:nvSpPr>
+          <p:cNvPr id="5" name="Slide Number Placeholder 4"/>
           <p:cNvSpPr>
             <a:spLocks noGrp="1"/>
           </p:cNvSpPr>
@@ -273,40 +264,43 @@
             <p:ph type="sldNum" sz="quarter" idx="3"/>
           </p:nvPr>
         </p:nvSpPr>
-        <p:spPr>
+        <p:spPr bwMode="white">
           <a:xfrm>
-            <a:off x="4024403" y="9720515"/>
-            <a:ext cx="3078427" cy="514099"/>
+            <a:off x="3971344" y="8829430"/>
+            <a:ext cx="3037840" cy="466971"/>
           </a:xfrm>
           <a:prstGeom prst="rect">
             <a:avLst/>
           </a:prstGeom>
-        </p:spPr>
-        <p:txBody>
-          <a:bodyPr vert="horz" lIns="99075" tIns="49538" rIns="99075" bIns="49538" rtlCol="0" anchor="b"/>
+          <a:ln>
+            <a:headEnd type="none"/>
+            <a:tailEnd type="none"/>
+          </a:ln>
+        </p:spPr>
+        <p:txBody>
+          <a:bodyPr wrap="square" lIns="93170" tIns="46586" rIns="93170" bIns="46586" anchor="b"/>
           <a:lstStyle>
             <a:lvl1pPr algn="r">
-              <a:defRPr sz="1300"/>
+              <a:defRPr sz="1200" dirty="0"/>
             </a:lvl1pPr>
           </a:lstStyle>
           <a:p>
             <a:fld id="{3573C7D9-E7FD-4F95-84AD-61199CE1380C}" type="slidenum">
-              <a:rPr lang="en-US" smtClean="0"/>
+              <a:rPr lang="en-US" dirty="0"/>
               <a:t>‹#›</a:t>
             </a:fld>
-            <a:endParaRPr lang="en-US"/>
+            <a:endParaRPr lang="en-US" dirty="0"/>
           </a:p>
         </p:txBody>
       </p:sp>
     </p:spTree>
     <p:extLst>
       <p:ext uri="{BB962C8B-B14F-4D97-AF65-F5344CB8AC3E}">
-        <p14:creationId xmlns:p14="http://schemas.microsoft.com/office/powerpoint/2010/main" val="2180013743"/>
+        <p14:creationId xmlns:p14="http://schemas.microsoft.com/office/powerpoint/2010/main" val="1"/>
       </p:ext>
     </p:extLst>
   </p:cSld>
   <p:clrMap bg1="lt1" tx1="dk1" bg2="lt2" tx2="dk2" accent1="accent1" accent2="accent2" accent3="accent3" accent4="accent4" accent5="accent5" accent6="accent6" hlink="hlink" folHlink="folHlink"/>
-  <p:hf sldNum="0" hdr="0" ftr="0" dt="0"/>
 </p:handoutMaster>
 </file>
 
@@ -314,9 +308,12 @@
 <p:notesMaster xmlns:a="http://schemas.openxmlformats.org/drawingml/2006/main" xmlns:r="http://schemas.openxmlformats.org/officeDocument/2006/relationships" xmlns:p="http://schemas.openxmlformats.org/presentationml/2006/main">
   <p:cSld>
     <p:bg>
-      <p:bgRef idx="1001">
-        <a:schemeClr val="bg1"/>
-      </p:bgRef>
+      <p:bgPr>
+        <a:solidFill>
+          <a:schemeClr val="lt1"/>
+        </a:solidFill>
+        <a:effectLst/>
+      </p:bgPr>
     </p:bg>
     <p:spTree>
       <p:nvGrpSpPr>
@@ -342,24 +339,28 @@
             <p:ph type="hdr" sz="quarter"/>
           </p:nvPr>
         </p:nvSpPr>
-        <p:spPr>
+        <p:spPr bwMode="white">
           <a:xfrm>
             <a:off x="0" y="1"/>
-            <a:ext cx="3078427" cy="514100"/>
+            <a:ext cx="3037840" cy="466972"/>
           </a:xfrm>
           <a:prstGeom prst="rect">
             <a:avLst/>
           </a:prstGeom>
-        </p:spPr>
-        <p:txBody>
-          <a:bodyPr vert="horz" lIns="99075" tIns="49538" rIns="99075" bIns="49538" rtlCol="0"/>
+          <a:ln>
+            <a:headEnd type="none"/>
+            <a:tailEnd type="none"/>
+          </a:ln>
+        </p:spPr>
+        <p:txBody>
+          <a:bodyPr wrap="square" lIns="93170" tIns="46586" rIns="93170" bIns="46586"/>
           <a:lstStyle>
             <a:lvl1pPr algn="l">
-              <a:defRPr sz="1300"/>
+              <a:defRPr sz="1200" dirty="0"/>
             </a:lvl1pPr>
           </a:lstStyle>
           <a:p>
-            <a:endParaRPr lang="en-US"/>
+            <a:endParaRPr lang="en-US" dirty="0"/>
           </a:p>
         </p:txBody>
       </p:sp>
@@ -373,28 +374,32 @@
             <p:ph type="dt" idx="1"/>
           </p:nvPr>
         </p:nvSpPr>
-        <p:spPr>
+        <p:spPr bwMode="white">
           <a:xfrm>
-            <a:off x="4024403" y="1"/>
-            <a:ext cx="3078427" cy="514100"/>
+            <a:off x="3971344" y="1"/>
+            <a:ext cx="3037840" cy="466972"/>
           </a:xfrm>
           <a:prstGeom prst="rect">
             <a:avLst/>
           </a:prstGeom>
-        </p:spPr>
-        <p:txBody>
-          <a:bodyPr vert="horz" lIns="99075" tIns="49538" rIns="99075" bIns="49538" rtlCol="0"/>
+          <a:ln>
+            <a:headEnd type="none"/>
+            <a:tailEnd type="none"/>
+          </a:ln>
+        </p:spPr>
+        <p:txBody>
+          <a:bodyPr wrap="square" lIns="93170" tIns="46586" rIns="93170" bIns="46586"/>
           <a:lstStyle>
             <a:lvl1pPr algn="r">
-              <a:defRPr sz="1300"/>
+              <a:defRPr sz="1200" dirty="0"/>
             </a:lvl1pPr>
           </a:lstStyle>
           <a:p>
             <a:fld id="{2CB70909-C19F-4098-BABE-826759D4F724}" type="datetimeFigureOut">
-              <a:rPr lang="en-US" smtClean="0"/>
-              <a:t>9/8/2021</a:t>
+              <a:rPr lang="en-US" dirty="0"/>
+              <a:t>9/30/2021</a:t>
             </a:fld>
-            <a:endParaRPr lang="en-US"/>
+            <a:endParaRPr lang="en-US" dirty="0"/>
           </a:p>
         </p:txBody>
       </p:sp>
@@ -408,10 +413,10 @@
             <p:ph type="sldImg" idx="2"/>
           </p:nvPr>
         </p:nvSpPr>
-        <p:spPr>
+        <p:spPr bwMode="white">
           <a:xfrm>
-            <a:off x="2463800" y="1279525"/>
-            <a:ext cx="2176463" cy="3454400"/>
+            <a:off x="2516188" y="1162050"/>
+            <a:ext cx="1978025" cy="3138488"/>
           </a:xfrm>
           <a:prstGeom prst="rect">
             <a:avLst/>
@@ -419,15 +424,17 @@
           <a:noFill/>
           <a:ln w="12700">
             <a:solidFill>
-              <a:prstClr val="black"/>
+              <a:srgbClr val="000000"/>
             </a:solidFill>
-          </a:ln>
-        </p:spPr>
-        <p:txBody>
-          <a:bodyPr vert="horz" lIns="99075" tIns="49538" rIns="99075" bIns="49538" rtlCol="0" anchor="ctr"/>
+            <a:headEnd type="none"/>
+            <a:tailEnd type="none"/>
+          </a:ln>
+        </p:spPr>
+        <p:txBody>
+          <a:bodyPr wrap="square" lIns="93170" tIns="46586" rIns="93170" bIns="46586" anchor="ctr"/>
           <a:lstStyle/>
           <a:p>
-            <a:endParaRPr lang="en-US"/>
+            <a:endParaRPr lang="en-US" dirty="0"/>
           </a:p>
         </p:txBody>
       </p:sp>
@@ -441,50 +448,53 @@
             <p:ph type="body" sz="quarter" idx="3"/>
           </p:nvPr>
         </p:nvSpPr>
-        <p:spPr>
+        <p:spPr bwMode="white">
           <a:xfrm>
-            <a:off x="710407" y="4925410"/>
-            <a:ext cx="5683250" cy="4029878"/>
+            <a:off x="701040" y="4473895"/>
+            <a:ext cx="5608320" cy="3660457"/>
           </a:xfrm>
           <a:prstGeom prst="rect">
             <a:avLst/>
           </a:prstGeom>
-        </p:spPr>
-        <p:txBody>
-          <a:bodyPr vert="horz" lIns="99075" tIns="49538" rIns="99075" bIns="49538" rtlCol="0"/>
+          <a:ln>
+            <a:headEnd type="none"/>
+            <a:tailEnd type="none"/>
+          </a:ln>
+        </p:spPr>
+        <p:txBody>
+          <a:bodyPr wrap="square" lIns="93170" tIns="46586" rIns="93170" bIns="46586"/>
           <a:lstStyle/>
           <a:p>
-            <a:pPr lvl="0"/>
-            <a:r>
-              <a:rPr lang="en-US"/>
+            <a:r>
+              <a:rPr lang="en-US" dirty="0"/>
               <a:t>Click to edit Master text styles</a:t>
             </a:r>
           </a:p>
           <a:p>
             <a:pPr lvl="1"/>
             <a:r>
-              <a:rPr lang="en-US"/>
+              <a:rPr lang="en-US" dirty="0"/>
               <a:t>Second level</a:t>
             </a:r>
           </a:p>
           <a:p>
             <a:pPr lvl="2"/>
             <a:r>
-              <a:rPr lang="en-US"/>
+              <a:rPr lang="en-US" dirty="0"/>
               <a:t>Third level</a:t>
             </a:r>
           </a:p>
           <a:p>
             <a:pPr lvl="3"/>
             <a:r>
-              <a:rPr lang="en-US"/>
+              <a:rPr lang="en-US" dirty="0"/>
               <a:t>Fourth level</a:t>
             </a:r>
           </a:p>
           <a:p>
             <a:pPr lvl="4"/>
             <a:r>
-              <a:rPr lang="en-US"/>
+              <a:rPr lang="en-US" dirty="0"/>
               <a:t>Fifth level</a:t>
             </a:r>
           </a:p>
@@ -500,24 +510,28 @@
             <p:ph type="ftr" sz="quarter" idx="4"/>
           </p:nvPr>
         </p:nvSpPr>
-        <p:spPr>
+        <p:spPr bwMode="white">
           <a:xfrm>
-            <a:off x="0" y="9720515"/>
-            <a:ext cx="3078427" cy="514099"/>
+            <a:off x="0" y="8829430"/>
+            <a:ext cx="3037840" cy="466971"/>
           </a:xfrm>
           <a:prstGeom prst="rect">
             <a:avLst/>
           </a:prstGeom>
-        </p:spPr>
-        <p:txBody>
-          <a:bodyPr vert="horz" lIns="99075" tIns="49538" rIns="99075" bIns="49538" rtlCol="0" anchor="b"/>
+          <a:ln>
+            <a:headEnd type="none"/>
+            <a:tailEnd type="none"/>
+          </a:ln>
+        </p:spPr>
+        <p:txBody>
+          <a:bodyPr wrap="square" lIns="93170" tIns="46586" rIns="93170" bIns="46586" anchor="b"/>
           <a:lstStyle>
             <a:lvl1pPr algn="l">
-              <a:defRPr sz="1300"/>
+              <a:defRPr sz="1200" dirty="0"/>
             </a:lvl1pPr>
           </a:lstStyle>
           <a:p>
-            <a:endParaRPr lang="en-US"/>
+            <a:endParaRPr lang="en-US" dirty="0"/>
           </a:p>
         </p:txBody>
       </p:sp>
@@ -531,129 +545,118 @@
             <p:ph type="sldNum" sz="quarter" idx="5"/>
           </p:nvPr>
         </p:nvSpPr>
-        <p:spPr>
+        <p:spPr bwMode="white">
           <a:xfrm>
-            <a:off x="4024403" y="9720515"/>
-            <a:ext cx="3078427" cy="514099"/>
+            <a:off x="3971344" y="8829430"/>
+            <a:ext cx="3037840" cy="466971"/>
           </a:xfrm>
           <a:prstGeom prst="rect">
             <a:avLst/>
           </a:prstGeom>
-        </p:spPr>
-        <p:txBody>
-          <a:bodyPr vert="horz" lIns="99075" tIns="49538" rIns="99075" bIns="49538" rtlCol="0" anchor="b"/>
+          <a:ln>
+            <a:headEnd type="none"/>
+            <a:tailEnd type="none"/>
+          </a:ln>
+        </p:spPr>
+        <p:txBody>
+          <a:bodyPr wrap="square" lIns="93170" tIns="46586" rIns="93170" bIns="46586" anchor="b"/>
           <a:lstStyle>
             <a:lvl1pPr algn="r">
-              <a:defRPr sz="1300"/>
+              <a:defRPr sz="1200" dirty="0"/>
             </a:lvl1pPr>
           </a:lstStyle>
           <a:p>
             <a:fld id="{CD6BBD11-A0DA-469A-B44A-B3198FFC6F45}" type="slidenum">
-              <a:rPr lang="en-US" smtClean="0"/>
+              <a:rPr lang="en-US" dirty="0"/>
               <a:t>‹#›</a:t>
             </a:fld>
-            <a:endParaRPr lang="en-US"/>
+            <a:endParaRPr lang="en-US" dirty="0"/>
           </a:p>
         </p:txBody>
       </p:sp>
     </p:spTree>
-    <p:extLst>
-      <p:ext uri="{BB962C8B-B14F-4D97-AF65-F5344CB8AC3E}">
-        <p14:creationId xmlns:p14="http://schemas.microsoft.com/office/powerpoint/2010/main" val="1485538541"/>
-      </p:ext>
-    </p:extLst>
   </p:cSld>
   <p:clrMap bg1="lt1" tx1="dk1" bg2="lt2" tx2="dk2" accent1="accent1" accent2="accent2" accent3="accent3" accent4="accent4" accent5="accent5" accent6="accent6" hlink="hlink" folHlink="folHlink"/>
-  <p:hf sldNum="0" hdr="0" ftr="0" dt="0"/>
   <p:notesStyle>
-    <a:lvl1pPr marL="0" algn="l" defTabSz="173043" rtl="0" eaLnBrk="1" latinLnBrk="0" hangingPunct="1">
-      <a:defRPr sz="228" kern="1200">
+    <a:lvl1pPr marL="0" algn="l" defTabSz="173043" rtl="0">
+      <a:defRPr sz="228" kern="1200" dirty="0">
         <a:solidFill>
-          <a:schemeClr val="tx1"/>
+          <a:schemeClr val="dk1"/>
         </a:solidFill>
         <a:latin typeface="+mn-lt"/>
         <a:ea typeface="+mn-ea"/>
-        <a:cs typeface="+mn-cs"/>
       </a:defRPr>
     </a:lvl1pPr>
-    <a:lvl2pPr marL="86523" algn="l" defTabSz="173043" rtl="0" eaLnBrk="1" latinLnBrk="0" hangingPunct="1">
-      <a:defRPr sz="228" kern="1200">
+    <a:lvl2pPr marL="86523" algn="l" defTabSz="173043" rtl="0">
+      <a:defRPr sz="228" kern="1200" dirty="0">
         <a:solidFill>
-          <a:schemeClr val="tx1"/>
+          <a:schemeClr val="dk1"/>
         </a:solidFill>
         <a:latin typeface="+mn-lt"/>
         <a:ea typeface="+mn-ea"/>
-        <a:cs typeface="+mn-cs"/>
       </a:defRPr>
     </a:lvl2pPr>
-    <a:lvl3pPr marL="173043" algn="l" defTabSz="173043" rtl="0" eaLnBrk="1" latinLnBrk="0" hangingPunct="1">
-      <a:defRPr sz="228" kern="1200">
+    <a:lvl3pPr marL="173043" algn="l" defTabSz="173043" rtl="0">
+      <a:defRPr sz="228" kern="1200" dirty="0">
         <a:solidFill>
-          <a:schemeClr val="tx1"/>
+          <a:schemeClr val="dk1"/>
         </a:solidFill>
         <a:latin typeface="+mn-lt"/>
         <a:ea typeface="+mn-ea"/>
-        <a:cs typeface="+mn-cs"/>
       </a:defRPr>
     </a:lvl3pPr>
-    <a:lvl4pPr marL="259566" algn="l" defTabSz="173043" rtl="0" eaLnBrk="1" latinLnBrk="0" hangingPunct="1">
-      <a:defRPr sz="228" kern="1200">
+    <a:lvl4pPr marL="259566" algn="l" defTabSz="173043" rtl="0">
+      <a:defRPr sz="228" kern="1200" dirty="0">
         <a:solidFill>
-          <a:schemeClr val="tx1"/>
+          <a:schemeClr val="dk1"/>
         </a:solidFill>
         <a:latin typeface="+mn-lt"/>
         <a:ea typeface="+mn-ea"/>
-        <a:cs typeface="+mn-cs"/>
       </a:defRPr>
     </a:lvl4pPr>
-    <a:lvl5pPr marL="346086" algn="l" defTabSz="173043" rtl="0" eaLnBrk="1" latinLnBrk="0" hangingPunct="1">
-      <a:defRPr sz="228" kern="1200">
+    <a:lvl5pPr marL="346086" algn="l" defTabSz="173043" rtl="0">
+      <a:defRPr sz="228" kern="1200" dirty="0">
         <a:solidFill>
-          <a:schemeClr val="tx1"/>
+          <a:schemeClr val="dk1"/>
         </a:solidFill>
         <a:latin typeface="+mn-lt"/>
         <a:ea typeface="+mn-ea"/>
-        <a:cs typeface="+mn-cs"/>
       </a:defRPr>
     </a:lvl5pPr>
-    <a:lvl6pPr marL="432609" algn="l" defTabSz="173043" rtl="0" eaLnBrk="1" latinLnBrk="0" hangingPunct="1">
-      <a:defRPr sz="228" kern="1200">
+    <a:lvl6pPr marL="432609" algn="l" defTabSz="173043" rtl="0">
+      <a:defRPr sz="228" kern="1200" dirty="0">
         <a:solidFill>
-          <a:schemeClr val="tx1"/>
+          <a:schemeClr val="dk1"/>
         </a:solidFill>
         <a:latin typeface="+mn-lt"/>
         <a:ea typeface="+mn-ea"/>
-        <a:cs typeface="+mn-cs"/>
       </a:defRPr>
     </a:lvl6pPr>
-    <a:lvl7pPr marL="519130" algn="l" defTabSz="173043" rtl="0" eaLnBrk="1" latinLnBrk="0" hangingPunct="1">
-      <a:defRPr sz="228" kern="1200">
+    <a:lvl7pPr marL="519130" algn="l" defTabSz="173043" rtl="0">
+      <a:defRPr sz="228" kern="1200" dirty="0">
         <a:solidFill>
-          <a:schemeClr val="tx1"/>
+          <a:schemeClr val="dk1"/>
         </a:solidFill>
         <a:latin typeface="+mn-lt"/>
         <a:ea typeface="+mn-ea"/>
-        <a:cs typeface="+mn-cs"/>
       </a:defRPr>
     </a:lvl7pPr>
-    <a:lvl8pPr marL="605652" algn="l" defTabSz="173043" rtl="0" eaLnBrk="1" latinLnBrk="0" hangingPunct="1">
-      <a:defRPr sz="228" kern="1200">
+    <a:lvl8pPr marL="605652" algn="l" defTabSz="173043" rtl="0">
+      <a:defRPr sz="228" kern="1200" dirty="0">
         <a:solidFill>
-          <a:schemeClr val="tx1"/>
+          <a:schemeClr val="dk1"/>
         </a:solidFill>
         <a:latin typeface="+mn-lt"/>
         <a:ea typeface="+mn-ea"/>
-        <a:cs typeface="+mn-cs"/>
       </a:defRPr>
     </a:lvl8pPr>
-    <a:lvl9pPr marL="692174" algn="l" defTabSz="173043" rtl="0" eaLnBrk="1" latinLnBrk="0" hangingPunct="1">
-      <a:defRPr sz="228" kern="1200">
+    <a:lvl9pPr marL="692174" algn="l" defTabSz="173043" rtl="0">
+      <a:defRPr sz="228" kern="1200" dirty="0">
         <a:solidFill>
-          <a:schemeClr val="tx1"/>
+          <a:schemeClr val="dk1"/>
         </a:solidFill>
         <a:latin typeface="+mn-lt"/>
         <a:ea typeface="+mn-ea"/>
-        <a:cs typeface="+mn-cs"/>
       </a:defRPr>
     </a:lvl9pPr>
   </p:notesStyle>
@@ -801,8 +804,8 @@
           <a:lstStyle/>
           <a:p>
             <a:fld id="{6595CB52-7A80-4EDE-BD89-15F3D80D2847}" type="datetime1">
-              <a:rPr lang="en-US" smtClean="0"/>
-              <a:t>9/8/2021</a:t>
+              <a:rPr lang="en-US" dirty="0"/>
+              <a:t>9/30/2021</a:t>
             </a:fld>
             <a:endParaRPr lang="en-US" dirty="0"/>
           </a:p>
@@ -988,8 +991,8 @@
           <a:lstStyle/>
           <a:p>
             <a:fld id="{FCBAD589-A814-48D4-A41D-AEEBA8B062ED}" type="datetime1">
-              <a:rPr lang="en-US" smtClean="0"/>
-              <a:t>9/8/2021</a:t>
+              <a:rPr lang="en-US" dirty="0"/>
+              <a:t>9/30/2021</a:t>
             </a:fld>
             <a:endParaRPr lang="en-US" dirty="0"/>
           </a:p>
@@ -1183,8 +1186,8 @@
           <a:lstStyle/>
           <a:p>
             <a:fld id="{9EE1E399-81D8-4F32-A773-79DD86C9D815}" type="datetime1">
-              <a:rPr lang="en-US" smtClean="0"/>
-              <a:t>9/8/2021</a:t>
+              <a:rPr lang="en-US" dirty="0"/>
+              <a:t>9/30/2021</a:t>
             </a:fld>
             <a:endParaRPr lang="en-US" dirty="0"/>
           </a:p>
@@ -1370,8 +1373,8 @@
           <a:lstStyle/>
           <a:p>
             <a:fld id="{798256AB-61F5-4AE9-B2A9-B219460FA3D9}" type="datetime1">
-              <a:rPr lang="en-US" smtClean="0"/>
-              <a:t>9/8/2021</a:t>
+              <a:rPr lang="en-US" dirty="0"/>
+              <a:t>9/30/2021</a:t>
             </a:fld>
             <a:endParaRPr lang="en-US" dirty="0"/>
           </a:p>
@@ -1632,8 +1635,8 @@
           <a:lstStyle/>
           <a:p>
             <a:fld id="{9232F403-2438-4303-9714-E49C6D0B1E28}" type="datetime1">
-              <a:rPr lang="en-US" smtClean="0"/>
-              <a:t>9/8/2021</a:t>
+              <a:rPr lang="en-US" dirty="0"/>
+              <a:t>9/30/2021</a:t>
             </a:fld>
             <a:endParaRPr lang="en-US" dirty="0"/>
           </a:p>
@@ -1882,8 +1885,8 @@
           <a:lstStyle/>
           <a:p>
             <a:fld id="{5F4B6725-C72E-4A01-97E1-5898CAC1CF6F}" type="datetime1">
-              <a:rPr lang="en-US" smtClean="0"/>
-              <a:t>9/8/2021</a:t>
+              <a:rPr lang="en-US" dirty="0"/>
+              <a:t>9/30/2021</a:t>
             </a:fld>
             <a:endParaRPr lang="en-US" dirty="0"/>
           </a:p>
@@ -2272,8 +2275,8 @@
           <a:lstStyle/>
           <a:p>
             <a:fld id="{2C272315-A371-4329-8393-D21113A0CC5B}" type="datetime1">
-              <a:rPr lang="en-US" smtClean="0"/>
-              <a:t>9/8/2021</a:t>
+              <a:rPr lang="en-US" dirty="0"/>
+              <a:t>9/30/2021</a:t>
             </a:fld>
             <a:endParaRPr lang="en-US" dirty="0"/>
           </a:p>
@@ -2404,8 +2407,8 @@
           <a:lstStyle/>
           <a:p>
             <a:fld id="{E3501887-07F5-4895-9E1A-2035534BDEE9}" type="datetime1">
-              <a:rPr lang="en-US" smtClean="0"/>
-              <a:t>9/8/2021</a:t>
+              <a:rPr lang="en-US" dirty="0"/>
+              <a:t>9/30/2021</a:t>
             </a:fld>
             <a:endParaRPr lang="en-US" dirty="0"/>
           </a:p>
@@ -2509,8 +2512,8 @@
           <a:lstStyle/>
           <a:p>
             <a:fld id="{F2A78092-FC37-4448-AF31-357D713EC2CE}" type="datetime1">
-              <a:rPr lang="en-US" smtClean="0"/>
-              <a:t>9/8/2021</a:t>
+              <a:rPr lang="en-US" dirty="0"/>
+              <a:t>9/30/2021</a:t>
             </a:fld>
             <a:endParaRPr lang="en-US" dirty="0"/>
           </a:p>
@@ -2804,8 +2807,8 @@
           <a:lstStyle/>
           <a:p>
             <a:fld id="{68303B59-8064-4F92-9589-6397FBC99231}" type="datetime1">
-              <a:rPr lang="en-US" smtClean="0"/>
-              <a:t>9/8/2021</a:t>
+              <a:rPr lang="en-US" dirty="0"/>
+              <a:t>9/30/2021</a:t>
             </a:fld>
             <a:endParaRPr lang="en-US" dirty="0"/>
           </a:p>
@@ -3077,8 +3080,8 @@
           <a:lstStyle/>
           <a:p>
             <a:fld id="{918ADC9D-7416-45ED-BDA5-6017A57A36C0}" type="datetime1">
-              <a:rPr lang="en-US" smtClean="0"/>
-              <a:t>9/8/2021</a:t>
+              <a:rPr lang="en-US" dirty="0"/>
+              <a:t>9/30/2021</a:t>
             </a:fld>
             <a:endParaRPr lang="en-US" dirty="0"/>
           </a:p>
@@ -3307,8 +3310,8 @@
           </a:lstStyle>
           <a:p>
             <a:fld id="{F0E8A625-E03B-4A49-8E37-41B5871683EF}" type="datetime1">
-              <a:rPr lang="en-US" smtClean="0"/>
-              <a:t>9/8/2021</a:t>
+              <a:rPr lang="en-US" dirty="0"/>
+              <a:t>9/30/2021</a:t>
             </a:fld>
             <a:endParaRPr lang="en-US" dirty="0"/>
           </a:p>
@@ -3698,12 +3701,1238 @@
           <a:chExt cx="0" cy="0"/>
         </a:xfrm>
       </p:grpSpPr>
+      <p:sp>
+        <p:nvSpPr>
+          <p:cNvPr id="16" name="Name"/>
+          <p:cNvSpPr txBox="1">
+            <a:spLocks noChangeArrowheads="1"/>
+          </p:cNvSpPr>
+          <p:nvPr/>
+        </p:nvSpPr>
+        <p:spPr bwMode="white">
+          <a:xfrm>
+            <a:off x="108003" y="1949305"/>
+            <a:ext cx="669145" cy="71183"/>
+          </a:xfrm>
+          <a:prstGeom prst="rect">
+            <a:avLst/>
+          </a:prstGeom>
+          <a:noFill/>
+          <a:ln w="9525">
+            <a:noFill/>
+            <a:headEnd type="none"/>
+            <a:tailEnd type="none"/>
+          </a:ln>
+        </p:spPr>
+        <p:style>
+          <a:lnRef idx="0">
+            <a:scrgbClr r="0" g="0" b="0"/>
+          </a:lnRef>
+          <a:fillRef idx="0">
+            <a:scrgbClr r="0" g="0" b="0"/>
+          </a:fillRef>
+          <a:effectRef idx="0">
+            <a:scrgbClr r="0" g="0" b="0"/>
+          </a:effectRef>
+          <a:fontRef idx="minor">
+            <a:schemeClr val="dk1"/>
+          </a:fontRef>
+        </p:style>
+        <p:txBody>
+          <a:bodyPr wrap="square" lIns="0" tIns="0" rIns="0" bIns="0" anchor="ctr"/>
+          <a:lstStyle>
+            <a:lvl1pPr marL="0" indent="0" defTabSz="173043">
+              <a:defRPr sz="1100" dirty="0">
+                <a:solidFill>
+                  <a:schemeClr val="tx1"/>
+                </a:solidFill>
+                <a:latin typeface="+mn-lt"/>
+                <a:ea typeface="+mn-ea"/>
+              </a:defRPr>
+            </a:lvl1pPr>
+            <a:lvl2pPr marL="457200" indent="0" defTabSz="173043">
+              <a:defRPr sz="1100" dirty="0">
+                <a:solidFill>
+                  <a:schemeClr val="tx1"/>
+                </a:solidFill>
+                <a:latin typeface="+mn-lt"/>
+                <a:ea typeface="+mn-ea"/>
+              </a:defRPr>
+            </a:lvl2pPr>
+            <a:lvl3pPr marL="914400" indent="0" defTabSz="173043">
+              <a:defRPr sz="1100" dirty="0">
+                <a:solidFill>
+                  <a:schemeClr val="tx1"/>
+                </a:solidFill>
+                <a:latin typeface="+mn-lt"/>
+                <a:ea typeface="+mn-ea"/>
+              </a:defRPr>
+            </a:lvl3pPr>
+            <a:lvl4pPr marL="1371600" indent="0" defTabSz="173043">
+              <a:defRPr sz="1100" dirty="0">
+                <a:solidFill>
+                  <a:schemeClr val="tx1"/>
+                </a:solidFill>
+                <a:latin typeface="+mn-lt"/>
+                <a:ea typeface="+mn-ea"/>
+              </a:defRPr>
+            </a:lvl4pPr>
+            <a:lvl5pPr marL="1828800" indent="0" defTabSz="173043">
+              <a:defRPr sz="1100" dirty="0">
+                <a:solidFill>
+                  <a:schemeClr val="tx1"/>
+                </a:solidFill>
+                <a:latin typeface="+mn-lt"/>
+                <a:ea typeface="+mn-ea"/>
+              </a:defRPr>
+            </a:lvl5pPr>
+            <a:lvl6pPr marL="2286000" indent="0" defTabSz="173043">
+              <a:defRPr sz="1100" dirty="0">
+                <a:solidFill>
+                  <a:schemeClr val="tx1"/>
+                </a:solidFill>
+                <a:latin typeface="+mn-lt"/>
+                <a:ea typeface="+mn-ea"/>
+              </a:defRPr>
+            </a:lvl6pPr>
+            <a:lvl7pPr marL="2743200" indent="0" defTabSz="173043">
+              <a:defRPr sz="1100" dirty="0">
+                <a:solidFill>
+                  <a:schemeClr val="tx1"/>
+                </a:solidFill>
+                <a:latin typeface="+mn-lt"/>
+                <a:ea typeface="+mn-ea"/>
+              </a:defRPr>
+            </a:lvl7pPr>
+            <a:lvl8pPr marL="3200400" indent="0" defTabSz="173043">
+              <a:defRPr sz="1100" dirty="0">
+                <a:solidFill>
+                  <a:schemeClr val="tx1"/>
+                </a:solidFill>
+                <a:latin typeface="+mn-lt"/>
+                <a:ea typeface="+mn-ea"/>
+              </a:defRPr>
+            </a:lvl8pPr>
+            <a:lvl9pPr marL="3657600" indent="0" defTabSz="173043">
+              <a:defRPr sz="1100" dirty="0">
+                <a:solidFill>
+                  <a:schemeClr val="tx1"/>
+                </a:solidFill>
+                <a:latin typeface="+mn-lt"/>
+                <a:ea typeface="+mn-ea"/>
+              </a:defRPr>
+            </a:lvl9pPr>
+          </a:lstStyle>
+          <a:p>
+            <a:pPr defTabSz="173043"/>
+            <a:endParaRPr lang="en-US" sz="800" b="1" dirty="0">
+              <a:latin typeface="Arial Narrow"/>
+            </a:endParaRPr>
+          </a:p>
+        </p:txBody>
+      </p:sp>
+      <p:sp>
+        <p:nvSpPr>
+          <p:cNvPr id="18" name="Text Box 3"/>
+          <p:cNvSpPr txBox="1">
+            <a:spLocks noChangeArrowheads="1"/>
+          </p:cNvSpPr>
+          <p:nvPr/>
+        </p:nvSpPr>
+        <p:spPr bwMode="auto">
+          <a:xfrm>
+            <a:off x="16569" y="1456508"/>
+            <a:ext cx="760579" cy="897004"/>
+          </a:xfrm>
+          <a:prstGeom prst="rect">
+            <a:avLst/>
+          </a:prstGeom>
+          <a:noFill/>
+          <a:ln>
+            <a:noFill/>
+            <a:headEnd type="none"/>
+            <a:tailEnd type="none"/>
+          </a:ln>
+        </p:spPr>
+        <p:txBody>
+          <a:bodyPr wrap="square" lIns="0" tIns="0" rIns="0" bIns="0" anchor="t">
+            <a:noAutofit/>
+          </a:bodyPr>
+          <a:lstStyle/>
+          <a:p>
+            <a:pPr marL="55880" indent="8890" defTabSz="173043">
+              <a:spcBef>
+                <a:spcPts val="0"/>
+              </a:spcBef>
+              <a:spcAft>
+                <a:spcPts val="0"/>
+              </a:spcAft>
+            </a:pPr>
+            <a:r>
+              <a:rPr lang="hi-IN" sz="800" b="1" dirty="0">
+                <a:latin typeface="Arial Narrow"/>
+              </a:rPr>
+              <a:t>नाम</a:t>
+            </a:r>
+            <a:r>
+              <a:rPr lang="en-US" sz="800" b="1" dirty="0">
+                <a:latin typeface="Arial Narrow"/>
+              </a:rPr>
+              <a:t>			:</a:t>
+            </a:r>
+          </a:p>
+          <a:p>
+            <a:pPr marL="55880" indent="8890" defTabSz="173043">
+              <a:spcBef>
+                <a:spcPts val="0"/>
+              </a:spcBef>
+              <a:spcAft>
+                <a:spcPts val="0"/>
+              </a:spcAft>
+            </a:pPr>
+            <a:r>
+              <a:rPr lang="hi-IN" sz="800" b="1" i="0" dirty="0">
+                <a:effectLst/>
+                <a:latin typeface="Segoe UI"/>
+              </a:rPr>
+              <a:t>प्लांट</a:t>
+            </a:r>
+            <a:r>
+              <a:rPr lang="en-US" sz="800" b="1" dirty="0">
+                <a:effectLst/>
+                <a:latin typeface="Arial Narrow"/>
+                <a:ea typeface="Arial"/>
+              </a:rPr>
+              <a:t>			:</a:t>
+            </a:r>
+            <a:endParaRPr lang="en-US" sz="800" b="1" dirty="0">
+              <a:latin typeface="Arial Narrow"/>
+              <a:ea typeface="Arial"/>
+            </a:endParaRPr>
+          </a:p>
+          <a:p>
+            <a:pPr marL="55880" indent="8890" defTabSz="173043"/>
+            <a:r>
+              <a:rPr lang="en-IN" sz="800" b="1" kern="100" dirty="0">
+                <a:solidFill>
+                  <a:srgbClr val="000000"/>
+                </a:solidFill>
+                <a:effectLst/>
+                <a:latin typeface="Arial Narrow"/>
+                <a:ea typeface="Times New Roman"/>
+              </a:rPr>
+              <a:t>नियुक्ति</a:t>
+            </a:r>
+            <a:r>
+              <a:rPr lang="en-IN" sz="800" b="1" kern="100" dirty="0">
+                <a:solidFill>
+                  <a:srgbClr val="000000"/>
+                </a:solidFill>
+                <a:latin typeface="Arial Narrow"/>
+                <a:ea typeface="Times New Roman"/>
+              </a:rPr>
+              <a:t> </a:t>
+            </a:r>
+            <a:r>
+              <a:rPr lang="hi-IN" sz="800" b="1" kern="100" dirty="0">
+                <a:solidFill>
+                  <a:srgbClr val="000000"/>
+                </a:solidFill>
+                <a:effectLst/>
+                <a:latin typeface="Arial Narrow"/>
+                <a:ea typeface="Times New Roman"/>
+              </a:rPr>
+              <a:t>दिनांक</a:t>
+            </a:r>
+            <a:r>
+              <a:rPr lang="en-US" sz="800" b="1" kern="100" dirty="0">
+                <a:solidFill>
+                  <a:srgbClr val="000000"/>
+                </a:solidFill>
+                <a:effectLst/>
+                <a:latin typeface="Arial Narrow"/>
+                <a:ea typeface="Times New Roman"/>
+              </a:rPr>
+              <a:t>	:</a:t>
+            </a:r>
+            <a:endParaRPr lang="en-US" sz="800" b="1" dirty="0">
+              <a:effectLst/>
+              <a:latin typeface="Arial Narrow"/>
+              <a:ea typeface="Arial"/>
+            </a:endParaRPr>
+          </a:p>
+          <a:p>
+            <a:pPr marL="55880" indent="8890" defTabSz="173043">
+              <a:spcBef>
+                <a:spcPts val="0"/>
+              </a:spcBef>
+              <a:spcAft>
+                <a:spcPts val="0"/>
+              </a:spcAft>
+            </a:pPr>
+            <a:r>
+              <a:rPr lang="hi-IN" sz="800" b="1" dirty="0">
+                <a:latin typeface="Arial Narrow"/>
+              </a:rPr>
+              <a:t>जन्मदिन</a:t>
+            </a:r>
+            <a:r>
+              <a:rPr lang="en-US" sz="800" b="1" dirty="0">
+                <a:latin typeface="Arial Narrow"/>
+              </a:rPr>
+              <a:t>		:</a:t>
+            </a:r>
+            <a:endParaRPr lang="en-US" sz="800" b="1" dirty="0">
+              <a:effectLst/>
+              <a:latin typeface="Arial Narrow"/>
+              <a:ea typeface="Arial"/>
+            </a:endParaRPr>
+          </a:p>
+          <a:p>
+            <a:pPr marL="55880" indent="8890" defTabSz="173043">
+              <a:spcBef>
+                <a:spcPts val="0"/>
+              </a:spcBef>
+              <a:spcAft>
+                <a:spcPts val="0"/>
+              </a:spcAft>
+            </a:pPr>
+            <a:r>
+              <a:rPr lang="hi-IN" sz="800" b="1" dirty="0">
+                <a:latin typeface="Arial Narrow"/>
+              </a:rPr>
+              <a:t>पिता</a:t>
+            </a:r>
+            <a:r>
+              <a:rPr lang="en-US" sz="800" b="1" dirty="0">
+                <a:latin typeface="Arial Narrow"/>
+              </a:rPr>
+              <a:t> </a:t>
+            </a:r>
+            <a:r>
+              <a:rPr lang="hi-IN" sz="800" b="1" dirty="0">
+                <a:latin typeface="Arial Narrow"/>
+              </a:rPr>
+              <a:t>का नाम</a:t>
+            </a:r>
+            <a:r>
+              <a:rPr lang="en-US" sz="800" b="1" dirty="0">
+                <a:latin typeface="Arial Narrow"/>
+              </a:rPr>
+              <a:t>	:</a:t>
+            </a:r>
+          </a:p>
+          <a:p>
+            <a:pPr marL="55880" indent="8890" defTabSz="173043">
+              <a:spcBef>
+                <a:spcPts val="0"/>
+              </a:spcBef>
+              <a:spcAft>
+                <a:spcPts val="0"/>
+              </a:spcAft>
+            </a:pPr>
+            <a:endParaRPr lang="en-US" sz="800" b="1" dirty="0">
+              <a:effectLst/>
+              <a:latin typeface="Arial Narrow"/>
+              <a:ea typeface="Arial"/>
+            </a:endParaRPr>
+          </a:p>
+          <a:p>
+            <a:pPr marL="55880" indent="8890" defTabSz="173043"/>
+            <a:r>
+              <a:rPr lang="hi-IN" sz="800" b="1" dirty="0">
+                <a:latin typeface="Arial Narrow"/>
+              </a:rPr>
+              <a:t>पता</a:t>
+            </a:r>
+            <a:r>
+              <a:rPr lang="en-US" sz="800" b="1" dirty="0">
+                <a:latin typeface="Arial Narrow"/>
+              </a:rPr>
+              <a:t> :                 </a:t>
+            </a:r>
+            <a:endParaRPr lang="en-US" sz="800" b="1" dirty="0">
+              <a:effectLst/>
+              <a:latin typeface="Arial Narrow"/>
+              <a:ea typeface="Arial"/>
+            </a:endParaRPr>
+          </a:p>
+        </p:txBody>
+      </p:sp>
       <p:pic>
         <p:nvPicPr>
-          <p:cNvPr id="9" name="EmpPicture">
+          <p:cNvPr id="4" name="Picture 3"/>
+          <p:cNvPicPr>
+            <a:picLocks noChangeAspect="1"/>
+          </p:cNvPicPr>
+          <p:nvPr/>
+        </p:nvPicPr>
+        <p:blipFill>
+          <a:blip r:embed="rId2">
+            <a:lum/>
+          </a:blip>
+          <a:srcRect/>
+          <a:stretch>
+            <a:fillRect/>
+          </a:stretch>
+        </p:blipFill>
+        <p:spPr bwMode="white">
+          <a:xfrm>
+            <a:off x="46790" y="111036"/>
+            <a:ext cx="354670" cy="394679"/>
+          </a:xfrm>
+          <a:prstGeom prst="rect">
+            <a:avLst/>
+          </a:prstGeom>
+          <a:ln>
+            <a:headEnd type="none"/>
+            <a:tailEnd type="none"/>
+          </a:ln>
+        </p:spPr>
+      </p:pic>
+      <p:sp>
+        <p:nvSpPr>
+          <p:cNvPr id="25" name="TextBox 24"/>
+          <p:cNvSpPr txBox="1">
+            <a:spLocks noChangeArrowheads="1"/>
+          </p:cNvSpPr>
+          <p:nvPr/>
+        </p:nvSpPr>
+        <p:spPr bwMode="white">
+          <a:xfrm>
+            <a:off x="409059" y="297379"/>
+            <a:ext cx="1522234" cy="253916"/>
+          </a:xfrm>
+          <a:prstGeom prst="rect">
+            <a:avLst/>
+          </a:prstGeom>
+          <a:noFill/>
+          <a:ln>
+            <a:headEnd type="none"/>
+            <a:tailEnd type="none"/>
+          </a:ln>
+        </p:spPr>
+        <p:txBody>
+          <a:bodyPr wrap="square">
+            <a:spAutoFit/>
+          </a:bodyPr>
+          <a:lstStyle/>
+          <a:p>
+            <a:pPr defTabSz="173043"/>
+            <a:r>
+              <a:rPr lang="hi-IN" sz="1050" b="1" dirty="0">
+                <a:latin typeface="Arial Narrow"/>
+              </a:rPr>
+              <a:t>प्रतिभा सिंटेक्स लिमिटेड</a:t>
+            </a:r>
+            <a:endParaRPr lang="en-US" sz="1050" b="1" dirty="0">
+              <a:latin typeface="Arial Narrow"/>
+            </a:endParaRPr>
+          </a:p>
+        </p:txBody>
+      </p:sp>
+      <p:sp>
+        <p:nvSpPr>
+          <p:cNvPr id="26" name="Rectangle 25"/>
+          <p:cNvSpPr>
+            <a:spLocks/>
+          </p:cNvSpPr>
+          <p:nvPr/>
+        </p:nvSpPr>
+        <p:spPr bwMode="white">
+          <a:xfrm>
+            <a:off x="16570" y="33868"/>
+            <a:ext cx="1914724" cy="3005472"/>
+          </a:xfrm>
+          <a:prstGeom prst="rect">
+            <a:avLst/>
+          </a:prstGeom>
+          <a:noFill/>
+          <a:ln>
+            <a:solidFill>
+              <a:schemeClr val="tx1"/>
+            </a:solidFill>
+            <a:headEnd type="none"/>
+            <a:tailEnd type="none"/>
+          </a:ln>
+        </p:spPr>
+        <p:style>
+          <a:lnRef idx="2">
+            <a:schemeClr val="accent1">
+              <a:shade val="50000"/>
+            </a:schemeClr>
+          </a:lnRef>
+          <a:fillRef idx="1">
+            <a:schemeClr val="accent1"/>
+          </a:fillRef>
+          <a:effectRef idx="0">
+            <a:schemeClr val="accent1"/>
+          </a:effectRef>
+          <a:fontRef idx="minor">
+            <a:schemeClr val="lt1"/>
+          </a:fontRef>
+        </p:style>
+        <p:txBody>
+          <a:bodyPr wrap="square" anchor="ctr"/>
+          <a:lstStyle/>
+          <a:p>
+            <a:pPr algn="ctr" defTabSz="173043"/>
+            <a:endParaRPr lang="en-US" sz="800" b="1" dirty="0">
+              <a:latin typeface="Arial Narrow"/>
+            </a:endParaRPr>
+          </a:p>
+        </p:txBody>
+      </p:sp>
+      <p:sp>
+        <p:nvSpPr>
+          <p:cNvPr id="17" name="ID"/>
+          <p:cNvSpPr txBox="1">
+            <a:spLocks noChangeArrowheads="1"/>
+          </p:cNvSpPr>
+          <p:nvPr/>
+        </p:nvSpPr>
+        <p:spPr bwMode="white">
+          <a:xfrm>
+            <a:off x="790306" y="1129531"/>
+            <a:ext cx="554053" cy="112520"/>
+          </a:xfrm>
+          <a:prstGeom prst="rect">
+            <a:avLst/>
+          </a:prstGeom>
+          <a:noFill/>
+          <a:ln w="9525">
+            <a:noFill/>
+            <a:headEnd type="none"/>
+            <a:tailEnd type="none"/>
+          </a:ln>
+        </p:spPr>
+        <p:style>
+          <a:lnRef idx="0">
+            <a:scrgbClr r="0" g="0" b="0"/>
+          </a:lnRef>
+          <a:fillRef idx="0">
+            <a:scrgbClr r="0" g="0" b="0"/>
+          </a:fillRef>
+          <a:effectRef idx="0">
+            <a:scrgbClr r="0" g="0" b="0"/>
+          </a:effectRef>
+          <a:fontRef idx="minor">
+            <a:schemeClr val="dk1"/>
+          </a:fontRef>
+        </p:style>
+        <p:txBody>
+          <a:bodyPr wrap="square" lIns="0" tIns="0" rIns="0" bIns="0" anchor="ctr"/>
+          <a:lstStyle>
+            <a:lvl1pPr marL="0" indent="0" defTabSz="173043">
+              <a:defRPr sz="1100" dirty="0">
+                <a:solidFill>
+                  <a:schemeClr val="tx1"/>
+                </a:solidFill>
+                <a:latin typeface="+mn-lt"/>
+                <a:ea typeface="+mn-ea"/>
+              </a:defRPr>
+            </a:lvl1pPr>
+            <a:lvl2pPr marL="457200" indent="0" defTabSz="173043">
+              <a:defRPr sz="1100" dirty="0">
+                <a:solidFill>
+                  <a:schemeClr val="tx1"/>
+                </a:solidFill>
+                <a:latin typeface="+mn-lt"/>
+                <a:ea typeface="+mn-ea"/>
+              </a:defRPr>
+            </a:lvl2pPr>
+            <a:lvl3pPr marL="914400" indent="0" defTabSz="173043">
+              <a:defRPr sz="1100" dirty="0">
+                <a:solidFill>
+                  <a:schemeClr val="tx1"/>
+                </a:solidFill>
+                <a:latin typeface="+mn-lt"/>
+                <a:ea typeface="+mn-ea"/>
+              </a:defRPr>
+            </a:lvl3pPr>
+            <a:lvl4pPr marL="1371600" indent="0" defTabSz="173043">
+              <a:defRPr sz="1100" dirty="0">
+                <a:solidFill>
+                  <a:schemeClr val="tx1"/>
+                </a:solidFill>
+                <a:latin typeface="+mn-lt"/>
+                <a:ea typeface="+mn-ea"/>
+              </a:defRPr>
+            </a:lvl4pPr>
+            <a:lvl5pPr marL="1828800" indent="0" defTabSz="173043">
+              <a:defRPr sz="1100" dirty="0">
+                <a:solidFill>
+                  <a:schemeClr val="tx1"/>
+                </a:solidFill>
+                <a:latin typeface="+mn-lt"/>
+                <a:ea typeface="+mn-ea"/>
+              </a:defRPr>
+            </a:lvl5pPr>
+            <a:lvl6pPr marL="2286000" indent="0" defTabSz="173043">
+              <a:defRPr sz="1100" dirty="0">
+                <a:solidFill>
+                  <a:schemeClr val="tx1"/>
+                </a:solidFill>
+                <a:latin typeface="+mn-lt"/>
+                <a:ea typeface="+mn-ea"/>
+              </a:defRPr>
+            </a:lvl6pPr>
+            <a:lvl7pPr marL="2743200" indent="0" defTabSz="173043">
+              <a:defRPr sz="1100" dirty="0">
+                <a:solidFill>
+                  <a:schemeClr val="tx1"/>
+                </a:solidFill>
+                <a:latin typeface="+mn-lt"/>
+                <a:ea typeface="+mn-ea"/>
+              </a:defRPr>
+            </a:lvl7pPr>
+            <a:lvl8pPr marL="3200400" indent="0" defTabSz="173043">
+              <a:defRPr sz="1100" dirty="0">
+                <a:solidFill>
+                  <a:schemeClr val="tx1"/>
+                </a:solidFill>
+                <a:latin typeface="+mn-lt"/>
+                <a:ea typeface="+mn-ea"/>
+              </a:defRPr>
+            </a:lvl8pPr>
+            <a:lvl9pPr marL="3657600" indent="0" defTabSz="173043">
+              <a:defRPr sz="1100" dirty="0">
+                <a:solidFill>
+                  <a:schemeClr val="tx1"/>
+                </a:solidFill>
+                <a:latin typeface="+mn-lt"/>
+                <a:ea typeface="+mn-ea"/>
+              </a:defRPr>
+            </a:lvl9pPr>
+          </a:lstStyle>
+          <a:p>
+            <a:pPr defTabSz="173043"/>
+            <a:r>
+              <a:rPr lang="hi-IN" sz="800" b="1" dirty="0">
+                <a:effectLst/>
+                <a:latin typeface="Arial Narrow"/>
+                <a:ea typeface="Arial"/>
+              </a:rPr>
+              <a:t>कार्ड नंबर</a:t>
+            </a:r>
+            <a:r>
+              <a:rPr lang="en-US" sz="800" b="1" dirty="0">
+                <a:effectLst/>
+                <a:latin typeface="Arial Narrow"/>
+                <a:ea typeface="Arial"/>
+              </a:rPr>
+              <a:t>:	</a:t>
+            </a:r>
+            <a:endParaRPr lang="en-US" sz="800" b="1" dirty="0">
+              <a:latin typeface="Arial Narrow"/>
+            </a:endParaRPr>
+          </a:p>
+        </p:txBody>
+      </p:sp>
+      <p:sp>
+        <p:nvSpPr>
+          <p:cNvPr id="19" name="ID"/>
+          <p:cNvSpPr txBox="1">
+            <a:spLocks noChangeArrowheads="1"/>
+          </p:cNvSpPr>
+          <p:nvPr/>
+        </p:nvSpPr>
+        <p:spPr bwMode="white">
+          <a:xfrm>
+            <a:off x="796394" y="1261376"/>
+            <a:ext cx="523281" cy="112520"/>
+          </a:xfrm>
+          <a:prstGeom prst="rect">
+            <a:avLst/>
+          </a:prstGeom>
+          <a:noFill/>
+          <a:ln w="9525">
+            <a:noFill/>
+            <a:headEnd type="none"/>
+            <a:tailEnd type="none"/>
+          </a:ln>
+        </p:spPr>
+        <p:style>
+          <a:lnRef idx="0">
+            <a:scrgbClr r="0" g="0" b="0"/>
+          </a:lnRef>
+          <a:fillRef idx="0">
+            <a:scrgbClr r="0" g="0" b="0"/>
+          </a:fillRef>
+          <a:effectRef idx="0">
+            <a:scrgbClr r="0" g="0" b="0"/>
+          </a:effectRef>
+          <a:fontRef idx="minor">
+            <a:schemeClr val="dk1"/>
+          </a:fontRef>
+        </p:style>
+        <p:txBody>
+          <a:bodyPr wrap="square" lIns="0" tIns="0" rIns="0" bIns="0" anchor="ctr"/>
+          <a:lstStyle>
+            <a:lvl1pPr marL="0" indent="0" defTabSz="173043">
+              <a:defRPr sz="1100" dirty="0">
+                <a:solidFill>
+                  <a:schemeClr val="tx1"/>
+                </a:solidFill>
+                <a:latin typeface="+mn-lt"/>
+                <a:ea typeface="+mn-ea"/>
+              </a:defRPr>
+            </a:lvl1pPr>
+            <a:lvl2pPr marL="457200" indent="0" defTabSz="173043">
+              <a:defRPr sz="1100" dirty="0">
+                <a:solidFill>
+                  <a:schemeClr val="tx1"/>
+                </a:solidFill>
+                <a:latin typeface="+mn-lt"/>
+                <a:ea typeface="+mn-ea"/>
+              </a:defRPr>
+            </a:lvl2pPr>
+            <a:lvl3pPr marL="914400" indent="0" defTabSz="173043">
+              <a:defRPr sz="1100" dirty="0">
+                <a:solidFill>
+                  <a:schemeClr val="tx1"/>
+                </a:solidFill>
+                <a:latin typeface="+mn-lt"/>
+                <a:ea typeface="+mn-ea"/>
+              </a:defRPr>
+            </a:lvl3pPr>
+            <a:lvl4pPr marL="1371600" indent="0" defTabSz="173043">
+              <a:defRPr sz="1100" dirty="0">
+                <a:solidFill>
+                  <a:schemeClr val="tx1"/>
+                </a:solidFill>
+                <a:latin typeface="+mn-lt"/>
+                <a:ea typeface="+mn-ea"/>
+              </a:defRPr>
+            </a:lvl4pPr>
+            <a:lvl5pPr marL="1828800" indent="0" defTabSz="173043">
+              <a:defRPr sz="1100" dirty="0">
+                <a:solidFill>
+                  <a:schemeClr val="tx1"/>
+                </a:solidFill>
+                <a:latin typeface="+mn-lt"/>
+                <a:ea typeface="+mn-ea"/>
+              </a:defRPr>
+            </a:lvl5pPr>
+            <a:lvl6pPr marL="2286000" indent="0" defTabSz="173043">
+              <a:defRPr sz="1100" dirty="0">
+                <a:solidFill>
+                  <a:schemeClr val="tx1"/>
+                </a:solidFill>
+                <a:latin typeface="+mn-lt"/>
+                <a:ea typeface="+mn-ea"/>
+              </a:defRPr>
+            </a:lvl6pPr>
+            <a:lvl7pPr marL="2743200" indent="0" defTabSz="173043">
+              <a:defRPr sz="1100" dirty="0">
+                <a:solidFill>
+                  <a:schemeClr val="tx1"/>
+                </a:solidFill>
+                <a:latin typeface="+mn-lt"/>
+                <a:ea typeface="+mn-ea"/>
+              </a:defRPr>
+            </a:lvl7pPr>
+            <a:lvl8pPr marL="3200400" indent="0" defTabSz="173043">
+              <a:defRPr sz="1100" dirty="0">
+                <a:solidFill>
+                  <a:schemeClr val="tx1"/>
+                </a:solidFill>
+                <a:latin typeface="+mn-lt"/>
+                <a:ea typeface="+mn-ea"/>
+              </a:defRPr>
+            </a:lvl8pPr>
+            <a:lvl9pPr marL="3657600" indent="0" defTabSz="173043">
+              <a:defRPr sz="1100" dirty="0">
+                <a:solidFill>
+                  <a:schemeClr val="tx1"/>
+                </a:solidFill>
+                <a:latin typeface="+mn-lt"/>
+                <a:ea typeface="+mn-ea"/>
+              </a:defRPr>
+            </a:lvl9pPr>
+          </a:lstStyle>
+          <a:p>
+            <a:pPr defTabSz="173043"/>
+            <a:r>
+              <a:rPr lang="hi-IN" sz="800" b="1" dirty="0">
+                <a:latin typeface="Arial Narrow"/>
+              </a:rPr>
+              <a:t>रक्त समूह</a:t>
+            </a:r>
+            <a:r>
+              <a:rPr lang="en-US" sz="800" b="1" dirty="0">
+                <a:effectLst/>
+                <a:latin typeface="Arial Narrow"/>
+                <a:ea typeface="Arial"/>
+              </a:rPr>
+              <a:t>:</a:t>
+            </a:r>
+            <a:endParaRPr lang="en-US" sz="800" b="1" dirty="0">
+              <a:latin typeface="Arial Narrow"/>
+            </a:endParaRPr>
+          </a:p>
+        </p:txBody>
+      </p:sp>
+      <p:sp>
+        <p:nvSpPr>
+          <p:cNvPr id="24" name="Department"/>
+          <p:cNvSpPr txBox="1">
+            <a:spLocks noChangeArrowheads="1"/>
+          </p:cNvSpPr>
+          <p:nvPr/>
+        </p:nvSpPr>
+        <p:spPr bwMode="white">
+          <a:xfrm>
+            <a:off x="75018" y="2088098"/>
+            <a:ext cx="848583" cy="72091"/>
+          </a:xfrm>
+          <a:prstGeom prst="rect">
+            <a:avLst/>
+          </a:prstGeom>
+          <a:noFill/>
+          <a:ln w="9525">
+            <a:noFill/>
+            <a:headEnd type="none"/>
+            <a:tailEnd type="none"/>
+          </a:ln>
+        </p:spPr>
+        <p:style>
+          <a:lnRef idx="0">
+            <a:scrgbClr r="0" g="0" b="0"/>
+          </a:lnRef>
+          <a:fillRef idx="0">
+            <a:scrgbClr r="0" g="0" b="0"/>
+          </a:fillRef>
+          <a:effectRef idx="0">
+            <a:scrgbClr r="0" g="0" b="0"/>
+          </a:effectRef>
+          <a:fontRef idx="minor">
+            <a:schemeClr val="dk1"/>
+          </a:fontRef>
+        </p:style>
+        <p:txBody>
+          <a:bodyPr wrap="square" lIns="0" tIns="0" rIns="0" bIns="0" anchor="ctr"/>
+          <a:lstStyle>
+            <a:lvl1pPr marL="0" indent="0" defTabSz="173043">
+              <a:defRPr sz="1100" dirty="0">
+                <a:solidFill>
+                  <a:schemeClr val="tx1"/>
+                </a:solidFill>
+                <a:latin typeface="+mn-lt"/>
+                <a:ea typeface="+mn-ea"/>
+              </a:defRPr>
+            </a:lvl1pPr>
+            <a:lvl2pPr marL="457200" indent="0" defTabSz="173043">
+              <a:defRPr sz="1100" dirty="0">
+                <a:solidFill>
+                  <a:schemeClr val="tx1"/>
+                </a:solidFill>
+                <a:latin typeface="+mn-lt"/>
+                <a:ea typeface="+mn-ea"/>
+              </a:defRPr>
+            </a:lvl2pPr>
+            <a:lvl3pPr marL="914400" indent="0" defTabSz="173043">
+              <a:defRPr sz="1100" dirty="0">
+                <a:solidFill>
+                  <a:schemeClr val="tx1"/>
+                </a:solidFill>
+                <a:latin typeface="+mn-lt"/>
+                <a:ea typeface="+mn-ea"/>
+              </a:defRPr>
+            </a:lvl3pPr>
+            <a:lvl4pPr marL="1371600" indent="0" defTabSz="173043">
+              <a:defRPr sz="1100" dirty="0">
+                <a:solidFill>
+                  <a:schemeClr val="tx1"/>
+                </a:solidFill>
+                <a:latin typeface="+mn-lt"/>
+                <a:ea typeface="+mn-ea"/>
+              </a:defRPr>
+            </a:lvl4pPr>
+            <a:lvl5pPr marL="1828800" indent="0" defTabSz="173043">
+              <a:defRPr sz="1100" dirty="0">
+                <a:solidFill>
+                  <a:schemeClr val="tx1"/>
+                </a:solidFill>
+                <a:latin typeface="+mn-lt"/>
+                <a:ea typeface="+mn-ea"/>
+              </a:defRPr>
+            </a:lvl5pPr>
+            <a:lvl6pPr marL="2286000" indent="0" defTabSz="173043">
+              <a:defRPr sz="1100" dirty="0">
+                <a:solidFill>
+                  <a:schemeClr val="tx1"/>
+                </a:solidFill>
+                <a:latin typeface="+mn-lt"/>
+                <a:ea typeface="+mn-ea"/>
+              </a:defRPr>
+            </a:lvl6pPr>
+            <a:lvl7pPr marL="2743200" indent="0" defTabSz="173043">
+              <a:defRPr sz="1100" dirty="0">
+                <a:solidFill>
+                  <a:schemeClr val="tx1"/>
+                </a:solidFill>
+                <a:latin typeface="+mn-lt"/>
+                <a:ea typeface="+mn-ea"/>
+              </a:defRPr>
+            </a:lvl7pPr>
+            <a:lvl8pPr marL="3200400" indent="0" defTabSz="173043">
+              <a:defRPr sz="1100" dirty="0">
+                <a:solidFill>
+                  <a:schemeClr val="tx1"/>
+                </a:solidFill>
+                <a:latin typeface="+mn-lt"/>
+                <a:ea typeface="+mn-ea"/>
+              </a:defRPr>
+            </a:lvl8pPr>
+            <a:lvl9pPr marL="3657600" indent="0" defTabSz="173043">
+              <a:defRPr sz="1100" dirty="0">
+                <a:solidFill>
+                  <a:schemeClr val="tx1"/>
+                </a:solidFill>
+                <a:latin typeface="+mn-lt"/>
+                <a:ea typeface="+mn-ea"/>
+              </a:defRPr>
+            </a:lvl9pPr>
+          </a:lstStyle>
+          <a:p>
+            <a:pPr defTabSz="173043"/>
+            <a:r>
+              <a:rPr lang="hi-IN" sz="800" b="1" dirty="0">
+                <a:latin typeface="Arial Narrow"/>
+              </a:rPr>
+              <a:t>फोन</a:t>
+            </a:r>
+            <a:r>
+              <a:rPr lang="en-US" sz="800" b="1" dirty="0">
+                <a:latin typeface="Arial Narrow"/>
+              </a:rPr>
+              <a:t>                    :</a:t>
+            </a:r>
+          </a:p>
+        </p:txBody>
+      </p:sp>
+      <p:grpSp>
+        <p:nvGrpSpPr>
+          <p:cNvPr id="33" name="Group 32">
             <a:extLst>
               <a:ext uri="{FF2B5EF4-FFF2-40B4-BE49-F238E27FC236}">
-                <a16:creationId xmlns:a16="http://schemas.microsoft.com/office/drawing/2014/main" id="{D0D72A86-0C89-4E8F-9483-ECD5255A56E1}"/>
+                <a16:creationId xmlns:a16="http://schemas.microsoft.com/office/drawing/2014/main" id="{33A5E363-7535-49C8-ADD7-62E37AB714BA}"/>
+              </a:ext>
+            </a:extLst>
+          </p:cNvPr>
+          <p:cNvGrpSpPr/>
+          <p:nvPr/>
+        </p:nvGrpSpPr>
+        <p:grpSpPr>
+          <a:xfrm>
+            <a:off x="18786" y="94598"/>
+            <a:ext cx="1910289" cy="2926604"/>
+            <a:chOff x="18786" y="94598"/>
+            <a:chExt cx="1910289" cy="2926604"/>
+          </a:xfrm>
+        </p:grpSpPr>
+        <p:grpSp>
+          <p:nvGrpSpPr>
+            <p:cNvPr id="34" name="Group 33">
+              <a:extLst>
+                <a:ext uri="{FF2B5EF4-FFF2-40B4-BE49-F238E27FC236}">
+                  <a16:creationId xmlns:a16="http://schemas.microsoft.com/office/drawing/2014/main" id="{E9410AE2-C949-4117-B696-A0F534A2248A}"/>
+                </a:ext>
+              </a:extLst>
+            </p:cNvPr>
+            <p:cNvGrpSpPr/>
+            <p:nvPr/>
+          </p:nvGrpSpPr>
+          <p:grpSpPr>
+            <a:xfrm>
+              <a:off x="18786" y="2513278"/>
+              <a:ext cx="1910289" cy="507924"/>
+              <a:chOff x="18786" y="2513278"/>
+              <a:chExt cx="1910289" cy="507924"/>
+            </a:xfrm>
+          </p:grpSpPr>
+          <p:sp>
+            <p:nvSpPr>
+              <p:cNvPr id="36" name="DOJ">
+                <a:extLst>
+                  <a:ext uri="{FF2B5EF4-FFF2-40B4-BE49-F238E27FC236}">
+                    <a16:creationId xmlns:a16="http://schemas.microsoft.com/office/drawing/2014/main" id="{BD9557E1-A99F-40AC-8795-65E61A751B8F}"/>
+                  </a:ext>
+                </a:extLst>
+              </p:cNvPr>
+              <p:cNvSpPr txBox="1">
+                <a:spLocks noChangeArrowheads="1"/>
+              </p:cNvSpPr>
+              <p:nvPr/>
+            </p:nvSpPr>
+            <p:spPr bwMode="white">
+              <a:xfrm>
+                <a:off x="1256765" y="2513278"/>
+                <a:ext cx="660404" cy="115763"/>
+              </a:xfrm>
+              <a:prstGeom prst="rect">
+                <a:avLst/>
+              </a:prstGeom>
+              <a:noFill/>
+              <a:ln w="9525">
+                <a:noFill/>
+                <a:headEnd type="none"/>
+                <a:tailEnd type="none"/>
+              </a:ln>
+            </p:spPr>
+            <p:style>
+              <a:lnRef idx="0">
+                <a:scrgbClr r="0" g="0" b="0"/>
+              </a:lnRef>
+              <a:fillRef idx="0">
+                <a:scrgbClr r="0" g="0" b="0"/>
+              </a:fillRef>
+              <a:effectRef idx="0">
+                <a:scrgbClr r="0" g="0" b="0"/>
+              </a:effectRef>
+              <a:fontRef idx="minor">
+                <a:schemeClr val="dk1"/>
+              </a:fontRef>
+            </p:style>
+            <p:txBody>
+              <a:bodyPr wrap="square" lIns="0" tIns="0" rIns="0" bIns="0" anchor="ctr"/>
+              <a:lstStyle>
+                <a:lvl1pPr marL="0" indent="0" defTabSz="173043">
+                  <a:defRPr sz="1100" dirty="0">
+                    <a:solidFill>
+                      <a:schemeClr val="tx1"/>
+                    </a:solidFill>
+                    <a:latin typeface="+mn-lt"/>
+                    <a:ea typeface="+mn-ea"/>
+                  </a:defRPr>
+                </a:lvl1pPr>
+                <a:lvl2pPr marL="457200" indent="0" defTabSz="173043">
+                  <a:defRPr sz="1100" dirty="0">
+                    <a:solidFill>
+                      <a:schemeClr val="tx1"/>
+                    </a:solidFill>
+                    <a:latin typeface="+mn-lt"/>
+                    <a:ea typeface="+mn-ea"/>
+                  </a:defRPr>
+                </a:lvl2pPr>
+                <a:lvl3pPr marL="914400" indent="0" defTabSz="173043">
+                  <a:defRPr sz="1100" dirty="0">
+                    <a:solidFill>
+                      <a:schemeClr val="tx1"/>
+                    </a:solidFill>
+                    <a:latin typeface="+mn-lt"/>
+                    <a:ea typeface="+mn-ea"/>
+                  </a:defRPr>
+                </a:lvl3pPr>
+                <a:lvl4pPr marL="1371600" indent="0" defTabSz="173043">
+                  <a:defRPr sz="1100" dirty="0">
+                    <a:solidFill>
+                      <a:schemeClr val="tx1"/>
+                    </a:solidFill>
+                    <a:latin typeface="+mn-lt"/>
+                    <a:ea typeface="+mn-ea"/>
+                  </a:defRPr>
+                </a:lvl4pPr>
+                <a:lvl5pPr marL="1828800" indent="0" defTabSz="173043">
+                  <a:defRPr sz="1100" dirty="0">
+                    <a:solidFill>
+                      <a:schemeClr val="tx1"/>
+                    </a:solidFill>
+                    <a:latin typeface="+mn-lt"/>
+                    <a:ea typeface="+mn-ea"/>
+                  </a:defRPr>
+                </a:lvl5pPr>
+                <a:lvl6pPr marL="2286000" indent="0" defTabSz="173043">
+                  <a:defRPr sz="1100" dirty="0">
+                    <a:solidFill>
+                      <a:schemeClr val="tx1"/>
+                    </a:solidFill>
+                    <a:latin typeface="+mn-lt"/>
+                    <a:ea typeface="+mn-ea"/>
+                  </a:defRPr>
+                </a:lvl6pPr>
+                <a:lvl7pPr marL="2743200" indent="0" defTabSz="173043">
+                  <a:defRPr sz="1100" dirty="0">
+                    <a:solidFill>
+                      <a:schemeClr val="tx1"/>
+                    </a:solidFill>
+                    <a:latin typeface="+mn-lt"/>
+                    <a:ea typeface="+mn-ea"/>
+                  </a:defRPr>
+                </a:lvl7pPr>
+                <a:lvl8pPr marL="3200400" indent="0" defTabSz="173043">
+                  <a:defRPr sz="1100" dirty="0">
+                    <a:solidFill>
+                      <a:schemeClr val="tx1"/>
+                    </a:solidFill>
+                    <a:latin typeface="+mn-lt"/>
+                    <a:ea typeface="+mn-ea"/>
+                  </a:defRPr>
+                </a:lvl8pPr>
+                <a:lvl9pPr marL="3657600" indent="0" defTabSz="173043">
+                  <a:defRPr sz="1100" dirty="0">
+                    <a:solidFill>
+                      <a:schemeClr val="tx1"/>
+                    </a:solidFill>
+                    <a:latin typeface="+mn-lt"/>
+                    <a:ea typeface="+mn-ea"/>
+                  </a:defRPr>
+                </a:lvl9pPr>
+              </a:lstStyle>
+              <a:p>
+                <a:pPr defTabSz="173043"/>
+                <a:r>
+                  <a:rPr lang="hi-IN" sz="700" b="1" dirty="0">
+                    <a:latin typeface="Arial Narrow"/>
+                  </a:rPr>
+                  <a:t>अधिकृत</a:t>
+                </a:r>
+                <a:r>
+                  <a:rPr lang="en-US" sz="700" b="1" dirty="0">
+                    <a:latin typeface="Arial Narrow"/>
+                  </a:rPr>
+                  <a:t> </a:t>
+                </a:r>
+                <a:r>
+                  <a:rPr lang="hi-IN" sz="700" b="1" dirty="0">
+                    <a:latin typeface="Arial Narrow"/>
+                  </a:rPr>
+                  <a:t>हस्ताक्षर</a:t>
+                </a:r>
+                <a:endParaRPr lang="en-US" sz="700" b="1" dirty="0">
+                  <a:latin typeface="Arial Narrow"/>
+                </a:endParaRPr>
+              </a:p>
+            </p:txBody>
+          </p:sp>
+          <p:sp>
+            <p:nvSpPr>
+              <p:cNvPr id="37" name="TextBox 36">
+                <a:extLst>
+                  <a:ext uri="{FF2B5EF4-FFF2-40B4-BE49-F238E27FC236}">
+                    <a16:creationId xmlns:a16="http://schemas.microsoft.com/office/drawing/2014/main" id="{D2179CC9-E286-4D2E-B02D-0129FC62B793}"/>
+                  </a:ext>
+                </a:extLst>
+              </p:cNvPr>
+              <p:cNvSpPr txBox="1">
+                <a:spLocks noChangeArrowheads="1"/>
+              </p:cNvSpPr>
+              <p:nvPr/>
+            </p:nvSpPr>
+            <p:spPr bwMode="white">
+              <a:xfrm>
+                <a:off x="18786" y="2651870"/>
+                <a:ext cx="1910289" cy="369332"/>
+              </a:xfrm>
+              <a:prstGeom prst="rect">
+                <a:avLst/>
+              </a:prstGeom>
+              <a:solidFill>
+                <a:srgbClr val="FF9933"/>
+              </a:solidFill>
+              <a:ln>
+                <a:headEnd type="none"/>
+                <a:tailEnd type="none"/>
+              </a:ln>
+            </p:spPr>
+            <p:txBody>
+              <a:bodyPr wrap="square">
+                <a:spAutoFit/>
+              </a:bodyPr>
+              <a:lstStyle/>
+              <a:p>
+                <a:pPr algn="ctr"/>
+                <a:r>
+                  <a:rPr lang="hi-IN" sz="500" dirty="0"/>
+                  <a:t>प्रतिभा मुख्य प्लांट, प्लॉट नं. 4, इंडस्ट्रियल ग्रोथ सेंटर, खेड़ा,</a:t>
+                </a:r>
+                <a:r>
+                  <a:rPr lang="en-US" sz="500" dirty="0"/>
+                  <a:t> </a:t>
+                </a:r>
+                <a:r>
+                  <a:rPr lang="hi-IN" sz="500" dirty="0"/>
+                  <a:t>पीथमपुर, धार, मध्य प्रदेश, </a:t>
+                </a:r>
+                <a:endParaRPr lang="en-US" sz="500" dirty="0"/>
+              </a:p>
+              <a:p>
+                <a:pPr algn="ctr"/>
+                <a:r>
+                  <a:rPr lang="en-US" sz="500" dirty="0"/>
+                  <a:t> </a:t>
+                </a:r>
+                <a:r>
+                  <a:rPr lang="hi-IN" sz="800" b="1" u="sng" dirty="0"/>
+                  <a:t>आपातकालीन फोन नंबर</a:t>
+                </a:r>
+                <a:r>
+                  <a:rPr lang="en-US" sz="800" b="1" u="sng" dirty="0"/>
+                  <a:t> </a:t>
+                </a:r>
+                <a:r>
+                  <a:rPr lang="hi-IN" sz="800" b="1" u="sng" dirty="0"/>
+                  <a:t>7292404319</a:t>
+                </a:r>
+                <a:endParaRPr lang="en-US" sz="800" b="1" u="sng" dirty="0"/>
+              </a:p>
+            </p:txBody>
+          </p:sp>
+        </p:grpSp>
+        <p:sp>
+          <p:nvSpPr>
+            <p:cNvPr id="35" name="Oval 34">
+              <a:extLst>
+                <a:ext uri="{FF2B5EF4-FFF2-40B4-BE49-F238E27FC236}">
+                  <a16:creationId xmlns:a16="http://schemas.microsoft.com/office/drawing/2014/main" id="{148F0BC4-1570-4067-9790-2F25EC9098B2}"/>
+                </a:ext>
+              </a:extLst>
+            </p:cNvPr>
+            <p:cNvSpPr/>
+            <p:nvPr/>
+          </p:nvSpPr>
+          <p:spPr>
+            <a:xfrm>
+              <a:off x="861773" y="94598"/>
+              <a:ext cx="249980" cy="71325"/>
+            </a:xfrm>
+            <a:prstGeom prst="ellipse">
+              <a:avLst/>
+            </a:prstGeom>
+          </p:spPr>
+          <p:style>
+            <a:lnRef idx="2">
+              <a:schemeClr val="dk1">
+                <a:shade val="50000"/>
+              </a:schemeClr>
+            </a:lnRef>
+            <a:fillRef idx="1">
+              <a:schemeClr val="dk1"/>
+            </a:fillRef>
+            <a:effectRef idx="0">
+              <a:schemeClr val="dk1"/>
+            </a:effectRef>
+            <a:fontRef idx="minor">
+              <a:schemeClr val="lt1"/>
+            </a:fontRef>
+          </p:style>
+          <p:txBody>
+            <a:bodyPr rtlCol="0" anchor="ctr"/>
+            <a:lstStyle/>
+            <a:p>
+              <a:pPr algn="ctr"/>
+              <a:endParaRPr lang="en-IN"/>
+            </a:p>
+          </p:txBody>
+        </p:sp>
+      </p:grpSp>
+      <p:pic>
+        <p:nvPicPr>
+          <p:cNvPr id="20" name="EmpQR">
+            <a:extLst>
+              <a:ext uri="{FF2B5EF4-FFF2-40B4-BE49-F238E27FC236}">
+                <a16:creationId xmlns:a16="http://schemas.microsoft.com/office/drawing/2014/main" id="{3F75363A-D138-4352-B4BE-36D38C3CE545}"/>
               </a:ext>
             </a:extLst>
           </p:cNvPr>
@@ -3713,7 +4942,37 @@
           <p:nvPr/>
         </p:nvPicPr>
         <p:blipFill>
-          <a:blip r:embed="rId2" cstate="print">
+          <a:blip r:embed="rId3"/>
+          <a:stretch>
+            <a:fillRect/>
+          </a:stretch>
+        </p:blipFill>
+        <p:spPr>
+          <a:xfrm>
+            <a:off x="1178596" y="575188"/>
+            <a:ext cx="531267" cy="468701"/>
+          </a:xfrm>
+          <a:prstGeom prst="rect">
+            <a:avLst/>
+          </a:prstGeom>
+        </p:spPr>
+      </p:pic>
+      <p:pic>
+        <p:nvPicPr>
+          <p:cNvPr id="21" name="EmpPicture">
+            <a:extLst>
+              <a:ext uri="{FF2B5EF4-FFF2-40B4-BE49-F238E27FC236}">
+                <a16:creationId xmlns:a16="http://schemas.microsoft.com/office/drawing/2014/main" id="{459BD532-3225-4198-AFBD-EDF250EA9A0F}"/>
+              </a:ext>
+            </a:extLst>
+          </p:cNvPr>
+          <p:cNvPicPr>
+            <a:picLocks noChangeAspect="1"/>
+          </p:cNvPicPr>
+          <p:nvPr/>
+        </p:nvPicPr>
+        <p:blipFill>
+          <a:blip r:embed="rId4" cstate="print">
             <a:extLst>
               <a:ext uri="{28A0092B-C50C-407E-A947-70E740481C1C}">
                 <a14:useLocalDpi xmlns:a14="http://schemas.microsoft.com/office/drawing/2010/main" val="0"/>
@@ -3760,10 +5019,10 @@
       </p:pic>
       <p:sp>
         <p:nvSpPr>
-          <p:cNvPr id="43" name="Name">
+          <p:cNvPr id="22" name="ID">
             <a:extLst>
               <a:ext uri="{FF2B5EF4-FFF2-40B4-BE49-F238E27FC236}">
-                <a16:creationId xmlns:a16="http://schemas.microsoft.com/office/drawing/2014/main" id="{B6B12232-9F2B-4294-8217-45E7AF310A7C}"/>
+                <a16:creationId xmlns:a16="http://schemas.microsoft.com/office/drawing/2014/main" id="{7988384D-E2B5-4FCF-B4B0-9BF2E7D3EF1F}"/>
               </a:ext>
             </a:extLst>
           </p:cNvPr>
@@ -3772,8 +5031,8 @@
         </p:nvSpPr>
         <p:spPr>
           <a:xfrm>
-            <a:off x="761062" y="1454408"/>
-            <a:ext cx="1113425" cy="88873"/>
+            <a:off x="1234772" y="1128410"/>
+            <a:ext cx="614053" cy="112520"/>
           </a:xfrm>
           <a:prstGeom prst="rect">
             <a:avLst/>
@@ -3893,21 +5152,21 @@
           </a:lstStyle>
           <a:p>
             <a:r>
-              <a:rPr lang="en-US" sz="800" dirty="0">
+              <a:rPr lang="en-US" sz="800" b="1" dirty="0">
                 <a:latin typeface="Arial Narrow" panose="020B0606020202030204" pitchFamily="34" charset="0"/>
                 <a:cs typeface="Arial" panose="020B0604020202020204" pitchFamily="34" charset="0"/>
               </a:rPr>
-              <a:t>{Name}</a:t>
-            </a:r>
-          </a:p>
-        </p:txBody>
-      </p:sp>
-      <p:sp>
-        <p:nvSpPr>
-          <p:cNvPr id="45" name="ID">
+              <a:t>{ID}</a:t>
+            </a:r>
+          </a:p>
+        </p:txBody>
+      </p:sp>
+      <p:sp>
+        <p:nvSpPr>
+          <p:cNvPr id="23" name="BloodGroup">
             <a:extLst>
               <a:ext uri="{FF2B5EF4-FFF2-40B4-BE49-F238E27FC236}">
-                <a16:creationId xmlns:a16="http://schemas.microsoft.com/office/drawing/2014/main" id="{40E9CA2C-1D4D-46B3-A4E6-3105B60FC880}"/>
+                <a16:creationId xmlns:a16="http://schemas.microsoft.com/office/drawing/2014/main" id="{7738FCFA-0CA0-4BAE-A554-54DC5BB46108}"/>
               </a:ext>
             </a:extLst>
           </p:cNvPr>
@@ -3916,8 +5175,8 @@
         </p:nvSpPr>
         <p:spPr>
           <a:xfrm>
-            <a:off x="1234772" y="1128410"/>
-            <a:ext cx="614053" cy="112520"/>
+            <a:off x="1248379" y="1240594"/>
+            <a:ext cx="560798" cy="132913"/>
           </a:xfrm>
           <a:prstGeom prst="rect">
             <a:avLst/>
@@ -4037,21 +5296,21 @@
           </a:lstStyle>
           <a:p>
             <a:r>
-              <a:rPr lang="en-US" sz="800" b="1" dirty="0">
+              <a:rPr lang="en-US" sz="800" dirty="0">
                 <a:latin typeface="Arial Narrow" panose="020B0606020202030204" pitchFamily="34" charset="0"/>
-                <a:cs typeface="Arial" panose="020B0604020202020204" pitchFamily="34" charset="0"/>
+                <a:cs typeface="Aharoni" panose="02010803020104030203" pitchFamily="2" charset="-79"/>
               </a:rPr>
-              <a:t>{ID}</a:t>
-            </a:r>
-          </a:p>
-        </p:txBody>
-      </p:sp>
-      <p:sp>
-        <p:nvSpPr>
-          <p:cNvPr id="53" name="DOJ">
+              <a:t>{BloodGroup}</a:t>
+            </a:r>
+          </a:p>
+        </p:txBody>
+      </p:sp>
+      <p:sp>
+        <p:nvSpPr>
+          <p:cNvPr id="27" name="Name">
             <a:extLst>
               <a:ext uri="{FF2B5EF4-FFF2-40B4-BE49-F238E27FC236}">
-                <a16:creationId xmlns:a16="http://schemas.microsoft.com/office/drawing/2014/main" id="{5AD335E8-37F9-4F56-9A6F-0284430FCE43}"/>
+                <a16:creationId xmlns:a16="http://schemas.microsoft.com/office/drawing/2014/main" id="{164039C0-186B-4AE7-82DC-BB5BF03E5C0B}"/>
               </a:ext>
             </a:extLst>
           </p:cNvPr>
@@ -4060,8 +5319,8 @@
         </p:nvSpPr>
         <p:spPr>
           <a:xfrm>
-            <a:off x="774873" y="1692764"/>
-            <a:ext cx="1054646" cy="120281"/>
+            <a:off x="761062" y="1454408"/>
+            <a:ext cx="1113425" cy="88873"/>
           </a:xfrm>
           <a:prstGeom prst="rect">
             <a:avLst/>
@@ -4185,17 +5444,17 @@
                 <a:latin typeface="Arial Narrow" panose="020B0606020202030204" pitchFamily="34" charset="0"/>
                 <a:cs typeface="Arial" panose="020B0604020202020204" pitchFamily="34" charset="0"/>
               </a:rPr>
-              <a:t>{DOJ}</a:t>
-            </a:r>
-          </a:p>
-        </p:txBody>
-      </p:sp>
-      <p:sp>
-        <p:nvSpPr>
-          <p:cNvPr id="55" name="DOJ">
+              <a:t>{Name}</a:t>
+            </a:r>
+          </a:p>
+        </p:txBody>
+      </p:sp>
+      <p:sp>
+        <p:nvSpPr>
+          <p:cNvPr id="28" name="DOJ">
             <a:extLst>
               <a:ext uri="{FF2B5EF4-FFF2-40B4-BE49-F238E27FC236}">
-                <a16:creationId xmlns:a16="http://schemas.microsoft.com/office/drawing/2014/main" id="{E88B1D44-6E86-483C-8414-2055C1FD6746}"/>
+                <a16:creationId xmlns:a16="http://schemas.microsoft.com/office/drawing/2014/main" id="{9D793F24-C603-46AC-80AD-BEA9F9521BE4}"/>
               </a:ext>
             </a:extLst>
           </p:cNvPr>
@@ -4204,8 +5463,8 @@
         </p:nvSpPr>
         <p:spPr>
           <a:xfrm>
-            <a:off x="1208302" y="2675065"/>
-            <a:ext cx="660404" cy="115763"/>
+            <a:off x="774873" y="1692764"/>
+            <a:ext cx="1054646" cy="120281"/>
           </a:xfrm>
           <a:prstGeom prst="rect">
             <a:avLst/>
@@ -4325,39 +5584,21 @@
           </a:lstStyle>
           <a:p>
             <a:r>
-              <a:rPr lang="hi-IN" sz="700" b="1" dirty="0">
+              <a:rPr lang="en-US" sz="800" dirty="0">
                 <a:latin typeface="Arial Narrow" panose="020B0606020202030204" pitchFamily="34" charset="0"/>
                 <a:cs typeface="Arial" panose="020B0604020202020204" pitchFamily="34" charset="0"/>
               </a:rPr>
-              <a:t>अधिकृत</a:t>
-            </a:r>
-            <a:r>
-              <a:rPr lang="en-US" sz="700" b="1" dirty="0">
-                <a:latin typeface="Arial Narrow" panose="020B0606020202030204" pitchFamily="34" charset="0"/>
-                <a:cs typeface="Arial" panose="020B0604020202020204" pitchFamily="34" charset="0"/>
-              </a:rPr>
-              <a:t> </a:t>
-            </a:r>
-            <a:r>
-              <a:rPr lang="hi-IN" sz="700" b="1" dirty="0">
-                <a:latin typeface="Arial Narrow" panose="020B0606020202030204" pitchFamily="34" charset="0"/>
-                <a:cs typeface="Arial" panose="020B0604020202020204" pitchFamily="34" charset="0"/>
-              </a:rPr>
-              <a:t>हस्ताक्षर</a:t>
-            </a:r>
-            <a:endParaRPr lang="en-US" sz="700" b="1" dirty="0">
-              <a:latin typeface="Arial Narrow" panose="020B0606020202030204" pitchFamily="34" charset="0"/>
-              <a:cs typeface="Arial" panose="020B0604020202020204" pitchFamily="34" charset="0"/>
-            </a:endParaRPr>
-          </a:p>
-        </p:txBody>
-      </p:sp>
-      <p:sp>
-        <p:nvSpPr>
-          <p:cNvPr id="16" name="Name">
+              <a:t>{DOJ}</a:t>
+            </a:r>
+          </a:p>
+        </p:txBody>
+      </p:sp>
+      <p:sp>
+        <p:nvSpPr>
+          <p:cNvPr id="29" name="DOJ">
             <a:extLst>
               <a:ext uri="{FF2B5EF4-FFF2-40B4-BE49-F238E27FC236}">
-                <a16:creationId xmlns:a16="http://schemas.microsoft.com/office/drawing/2014/main" id="{C8F46744-08AA-4FDA-9050-49C076C77E40}"/>
+                <a16:creationId xmlns:a16="http://schemas.microsoft.com/office/drawing/2014/main" id="{ABF4EA3F-4C60-4C36-B174-F044002E1762}"/>
               </a:ext>
             </a:extLst>
           </p:cNvPr>
@@ -4366,8 +5607,8 @@
         </p:nvSpPr>
         <p:spPr>
           <a:xfrm>
-            <a:off x="108003" y="1949305"/>
-            <a:ext cx="1113425" cy="94999"/>
+            <a:off x="777148" y="1822862"/>
+            <a:ext cx="942017" cy="117276"/>
           </a:xfrm>
           <a:prstGeom prst="rect">
             <a:avLst/>
@@ -4486,285 +5727,83 @@
             </a:lvl9pPr>
           </a:lstStyle>
           <a:p>
-            <a:endParaRPr lang="en-US" sz="800" b="1" dirty="0">
-              <a:latin typeface="Arial Narrow" panose="020B0606020202030204" pitchFamily="34" charset="0"/>
-              <a:cs typeface="Arial" panose="020B0604020202020204" pitchFamily="34" charset="0"/>
-            </a:endParaRPr>
-          </a:p>
-        </p:txBody>
-      </p:sp>
-      <p:sp>
-        <p:nvSpPr>
-          <p:cNvPr id="18" name="Text Box 3">
+            <a:r>
+              <a:rPr lang="en-US" sz="800" dirty="0">
+                <a:latin typeface="Arial Narrow" panose="020B0606020202030204" pitchFamily="34" charset="0"/>
+                <a:cs typeface="Aharoni" panose="02010803020104030203" pitchFamily="2" charset="-79"/>
+              </a:rPr>
+              <a:t>{DOB}</a:t>
+            </a:r>
+          </a:p>
+        </p:txBody>
+      </p:sp>
+      <p:sp>
+        <p:nvSpPr>
+          <p:cNvPr id="30" name="TextBox 29">
             <a:extLst>
               <a:ext uri="{FF2B5EF4-FFF2-40B4-BE49-F238E27FC236}">
-                <a16:creationId xmlns:a16="http://schemas.microsoft.com/office/drawing/2014/main" id="{C697C451-A922-4EEF-99B1-9A0B329728C1}"/>
+                <a16:creationId xmlns:a16="http://schemas.microsoft.com/office/drawing/2014/main" id="{485C533E-CD51-4C36-B9D4-28A43DEC1204}"/>
               </a:ext>
             </a:extLst>
           </p:cNvPr>
-          <p:cNvSpPr txBox="1">
-            <a:spLocks noChangeArrowheads="1"/>
-          </p:cNvSpPr>
+          <p:cNvSpPr txBox="1"/>
           <p:nvPr/>
         </p:nvSpPr>
-        <p:spPr bwMode="auto">
+        <p:spPr>
           <a:xfrm>
-            <a:off x="16569" y="1456508"/>
-            <a:ext cx="760579" cy="897004"/>
+            <a:off x="674129" y="1876083"/>
+            <a:ext cx="1252774" cy="215444"/>
           </a:xfrm>
           <a:prstGeom prst="rect">
             <a:avLst/>
           </a:prstGeom>
           <a:noFill/>
-          <a:ln>
-            <a:noFill/>
-          </a:ln>
-        </p:spPr>
-        <p:txBody>
-          <a:bodyPr rot="0" vert="horz" wrap="square" lIns="0" tIns="0" rIns="0" bIns="0" anchor="t" anchorCtr="0" upright="1">
-            <a:noAutofit/>
+        </p:spPr>
+        <p:txBody>
+          <a:bodyPr wrap="square">
+            <a:spAutoFit/>
           </a:bodyPr>
           <a:lstStyle/>
           <a:p>
-            <a:pPr marL="55880" marR="0" indent="8890">
-              <a:spcBef>
-                <a:spcPts val="0"/>
-              </a:spcBef>
-              <a:spcAft>
-                <a:spcPts val="0"/>
-              </a:spcAft>
-            </a:pPr>
-            <a:r>
-              <a:rPr lang="hi-IN" sz="800" b="1" dirty="0">
-                <a:latin typeface="Arial Narrow" panose="020B0606020202030204" pitchFamily="34" charset="0"/>
-                <a:cs typeface="Arial" panose="020B0604020202020204" pitchFamily="34" charset="0"/>
-              </a:rPr>
-              <a:t>नाम</a:t>
-            </a:r>
-            <a:r>
-              <a:rPr lang="en-US" sz="800" b="1" dirty="0">
-                <a:latin typeface="Arial Narrow" panose="020B0606020202030204" pitchFamily="34" charset="0"/>
-                <a:cs typeface="Arial" panose="020B0604020202020204" pitchFamily="34" charset="0"/>
-              </a:rPr>
-              <a:t>			:</a:t>
-            </a:r>
-          </a:p>
-          <a:p>
-            <a:pPr marL="55880" marR="0" indent="8890">
-              <a:spcBef>
-                <a:spcPts val="0"/>
-              </a:spcBef>
-              <a:spcAft>
-                <a:spcPts val="0"/>
-              </a:spcAft>
-            </a:pPr>
-            <a:r>
-              <a:rPr lang="hi-IN" sz="800" b="1" dirty="0">
-                <a:effectLst/>
-                <a:latin typeface="Arial Narrow" panose="020B0606020202030204" pitchFamily="34" charset="0"/>
-                <a:ea typeface="Arial" panose="020B0604020202020204" pitchFamily="34" charset="0"/>
-              </a:rPr>
-              <a:t>कारखाना</a:t>
-            </a:r>
-            <a:r>
-              <a:rPr lang="en-US" sz="800" b="1" dirty="0">
-                <a:effectLst/>
-                <a:latin typeface="Arial Narrow" panose="020B0606020202030204" pitchFamily="34" charset="0"/>
-                <a:ea typeface="Arial" panose="020B0604020202020204" pitchFamily="34" charset="0"/>
-              </a:rPr>
-              <a:t>		:</a:t>
-            </a:r>
-            <a:endParaRPr lang="en-US" sz="800" b="1" dirty="0">
-              <a:latin typeface="Arial Narrow" panose="020B0606020202030204" pitchFamily="34" charset="0"/>
-              <a:ea typeface="Arial" panose="020B0604020202020204" pitchFamily="34" charset="0"/>
-            </a:endParaRPr>
-          </a:p>
-          <a:p>
-            <a:pPr marL="55880" indent="8890"/>
-            <a:r>
-              <a:rPr lang="en-IN" sz="800" b="1" kern="100" dirty="0" err="1">
-                <a:solidFill>
-                  <a:srgbClr val="000000"/>
-                </a:solidFill>
+            <a:r>
+              <a:rPr lang="en-US" sz="800" dirty="0">
                 <a:effectLst/>
                 <a:latin typeface="Arial Narrow" panose="020B0606020202030204" pitchFamily="34" charset="0"/>
                 <a:ea typeface="Times New Roman" panose="02020603050405020304" pitchFamily="18" charset="0"/>
+                <a:cs typeface="Calibri Light" panose="020F0302020204030204" pitchFamily="34" charset="0"/>
               </a:rPr>
-              <a:t>नियुक्ति</a:t>
-            </a:r>
-            <a:r>
-              <a:rPr lang="en-IN" sz="800" b="1" kern="100" dirty="0">
-                <a:solidFill>
-                  <a:srgbClr val="000000"/>
-                </a:solidFill>
-                <a:latin typeface="Arial Narrow" panose="020B0606020202030204" pitchFamily="34" charset="0"/>
-                <a:ea typeface="Times New Roman" panose="02020603050405020304" pitchFamily="18" charset="0"/>
-              </a:rPr>
-              <a:t> </a:t>
-            </a:r>
-            <a:r>
-              <a:rPr lang="hi-IN" sz="800" b="1" kern="100" dirty="0">
-                <a:solidFill>
-                  <a:srgbClr val="000000"/>
-                </a:solidFill>
+              <a:t>{</a:t>
+            </a:r>
+            <a:r>
+              <a:rPr lang="en-US" sz="800" dirty="0" err="1">
                 <a:effectLst/>
                 <a:latin typeface="Arial Narrow" panose="020B0606020202030204" pitchFamily="34" charset="0"/>
                 <a:ea typeface="Times New Roman" panose="02020603050405020304" pitchFamily="18" charset="0"/>
+                <a:cs typeface="Calibri Light" panose="020F0302020204030204" pitchFamily="34" charset="0"/>
               </a:rPr>
-              <a:t>दिनांक</a:t>
-            </a:r>
-            <a:r>
-              <a:rPr lang="en-US" sz="800" b="1" kern="100" dirty="0">
-                <a:solidFill>
-                  <a:srgbClr val="000000"/>
-                </a:solidFill>
+              <a:t>FatherName</a:t>
+            </a:r>
+            <a:r>
+              <a:rPr lang="en-US" sz="800" dirty="0">
                 <a:effectLst/>
                 <a:latin typeface="Arial Narrow" panose="020B0606020202030204" pitchFamily="34" charset="0"/>
                 <a:ea typeface="Times New Roman" panose="02020603050405020304" pitchFamily="18" charset="0"/>
+                <a:cs typeface="Calibri Light" panose="020F0302020204030204" pitchFamily="34" charset="0"/>
               </a:rPr>
-              <a:t>	:</a:t>
-            </a:r>
-            <a:endParaRPr lang="en-US" sz="800" b="1" dirty="0">
-              <a:effectLst/>
+              <a:t>}</a:t>
+            </a:r>
+            <a:endParaRPr lang="en-US" sz="800" dirty="0">
               <a:latin typeface="Arial Narrow" panose="020B0606020202030204" pitchFamily="34" charset="0"/>
-              <a:ea typeface="Arial" panose="020B0604020202020204" pitchFamily="34" charset="0"/>
-              <a:cs typeface="Arial" panose="020B0604020202020204" pitchFamily="34" charset="0"/>
             </a:endParaRPr>
           </a:p>
-          <a:p>
-            <a:pPr marL="55880" marR="0" indent="8890">
-              <a:spcBef>
-                <a:spcPts val="0"/>
-              </a:spcBef>
-              <a:spcAft>
-                <a:spcPts val="0"/>
-              </a:spcAft>
-            </a:pPr>
-            <a:r>
-              <a:rPr lang="hi-IN" sz="800" b="1" dirty="0">
-                <a:latin typeface="Arial Narrow" panose="020B0606020202030204" pitchFamily="34" charset="0"/>
-              </a:rPr>
-              <a:t>जन्मदिन</a:t>
-            </a:r>
-            <a:r>
-              <a:rPr lang="en-US" sz="800" b="1" dirty="0">
-                <a:latin typeface="Arial Narrow" panose="020B0606020202030204" pitchFamily="34" charset="0"/>
-              </a:rPr>
-              <a:t>		:</a:t>
-            </a:r>
-            <a:endParaRPr lang="en-US" sz="800" b="1" dirty="0">
-              <a:effectLst/>
-              <a:latin typeface="Arial Narrow" panose="020B0606020202030204" pitchFamily="34" charset="0"/>
-              <a:ea typeface="Arial" panose="020B0604020202020204" pitchFamily="34" charset="0"/>
-            </a:endParaRPr>
-          </a:p>
-          <a:p>
-            <a:pPr marL="55880" marR="0" indent="8890">
-              <a:spcBef>
-                <a:spcPts val="0"/>
-              </a:spcBef>
-              <a:spcAft>
-                <a:spcPts val="0"/>
-              </a:spcAft>
-            </a:pPr>
-            <a:r>
-              <a:rPr lang="hi-IN" sz="800" b="1" dirty="0">
-                <a:latin typeface="Arial Narrow" panose="020B0606020202030204" pitchFamily="34" charset="0"/>
-              </a:rPr>
-              <a:t>पिता</a:t>
-            </a:r>
-            <a:r>
-              <a:rPr lang="en-US" sz="800" b="1" dirty="0">
-                <a:latin typeface="Arial Narrow" panose="020B0606020202030204" pitchFamily="34" charset="0"/>
-              </a:rPr>
-              <a:t> </a:t>
-            </a:r>
-            <a:r>
-              <a:rPr lang="hi-IN" sz="800" b="1" dirty="0">
-                <a:latin typeface="Arial Narrow" panose="020B0606020202030204" pitchFamily="34" charset="0"/>
-              </a:rPr>
-              <a:t>का नाम</a:t>
-            </a:r>
-            <a:r>
-              <a:rPr lang="en-US" sz="800" b="1" dirty="0">
-                <a:latin typeface="Arial Narrow" panose="020B0606020202030204" pitchFamily="34" charset="0"/>
-              </a:rPr>
-              <a:t>	:</a:t>
-            </a:r>
-          </a:p>
-          <a:p>
-            <a:pPr marL="55880" marR="0" indent="8890">
-              <a:spcBef>
-                <a:spcPts val="0"/>
-              </a:spcBef>
-              <a:spcAft>
-                <a:spcPts val="0"/>
-              </a:spcAft>
-            </a:pPr>
-            <a:endParaRPr lang="en-US" sz="800" b="1" dirty="0">
-              <a:effectLst/>
-              <a:latin typeface="Arial Narrow" panose="020B0606020202030204" pitchFamily="34" charset="0"/>
-              <a:ea typeface="Arial" panose="020B0604020202020204" pitchFamily="34" charset="0"/>
-            </a:endParaRPr>
-          </a:p>
-          <a:p>
-            <a:pPr marL="55880" indent="8890"/>
-            <a:r>
-              <a:rPr lang="hi-IN" sz="800" b="1" dirty="0">
-                <a:latin typeface="Arial Narrow" panose="020B0606020202030204" pitchFamily="34" charset="0"/>
-              </a:rPr>
-              <a:t>पता</a:t>
-            </a:r>
-            <a:r>
-              <a:rPr lang="en-US" sz="800" b="1" dirty="0">
-                <a:latin typeface="Arial Narrow" panose="020B0606020202030204" pitchFamily="34" charset="0"/>
-              </a:rPr>
-              <a:t> :</a:t>
-            </a:r>
-            <a:endParaRPr lang="en-US" sz="800" b="1" dirty="0">
-              <a:effectLst/>
-              <a:latin typeface="Arial Narrow" panose="020B0606020202030204" pitchFamily="34" charset="0"/>
-              <a:ea typeface="Arial" panose="020B0604020202020204" pitchFamily="34" charset="0"/>
-            </a:endParaRPr>
-          </a:p>
-        </p:txBody>
-      </p:sp>
-      <p:pic>
-        <p:nvPicPr>
-          <p:cNvPr id="4" name="Picture 3">
+        </p:txBody>
+      </p:sp>
+      <p:sp>
+        <p:nvSpPr>
+          <p:cNvPr id="31" name="DOJ">
             <a:extLst>
               <a:ext uri="{FF2B5EF4-FFF2-40B4-BE49-F238E27FC236}">
-                <a16:creationId xmlns:a16="http://schemas.microsoft.com/office/drawing/2014/main" id="{FC9200EA-7EBD-44B7-A02A-220EC2032733}"/>
-              </a:ext>
-            </a:extLst>
-          </p:cNvPr>
-          <p:cNvPicPr>
-            <a:picLocks noChangeAspect="1"/>
-          </p:cNvPicPr>
-          <p:nvPr/>
-        </p:nvPicPr>
-        <p:blipFill>
-          <a:blip r:embed="rId3"/>
-          <a:stretch>
-            <a:fillRect/>
-          </a:stretch>
-        </p:blipFill>
-        <p:spPr>
-          <a:xfrm>
-            <a:off x="46790" y="111036"/>
-            <a:ext cx="354670" cy="394679"/>
-          </a:xfrm>
-          <a:prstGeom prst="rect">
-            <a:avLst/>
-          </a:prstGeom>
-        </p:spPr>
-      </p:pic>
-      <p:sp>
-        <p:nvSpPr>
-          <p:cNvPr id="25" name="TextBox 24">
-            <a:extLst>
-              <a:ext uri="{FF2B5EF4-FFF2-40B4-BE49-F238E27FC236}">
-                <a16:creationId xmlns:a16="http://schemas.microsoft.com/office/drawing/2014/main" id="{BBD6ACE2-82E0-4784-83E6-47A188992C84}"/>
+                <a16:creationId xmlns:a16="http://schemas.microsoft.com/office/drawing/2014/main" id="{2A78AD5F-F85B-46DD-8329-9C303F91FEC6}"/>
               </a:ext>
             </a:extLst>
           </p:cNvPr>
@@ -4773,102 +5812,8 @@
         </p:nvSpPr>
         <p:spPr>
           <a:xfrm>
-            <a:off x="409059" y="297379"/>
-            <a:ext cx="1522234" cy="253916"/>
-          </a:xfrm>
-          <a:prstGeom prst="rect">
-            <a:avLst/>
-          </a:prstGeom>
-          <a:noFill/>
-        </p:spPr>
-        <p:txBody>
-          <a:bodyPr wrap="square">
-            <a:spAutoFit/>
-          </a:bodyPr>
-          <a:lstStyle/>
-          <a:p>
-            <a:r>
-              <a:rPr lang="hi-IN" sz="1050" b="1" dirty="0">
-                <a:latin typeface="Arial Narrow" panose="020B0606020202030204" pitchFamily="34" charset="0"/>
-              </a:rPr>
-              <a:t>प्रतिभा सिंटेक्स लिमिटेड</a:t>
-            </a:r>
-            <a:endParaRPr lang="en-US" sz="1050" b="1" dirty="0">
-              <a:latin typeface="Arial Narrow" panose="020B0606020202030204" pitchFamily="34" charset="0"/>
-            </a:endParaRPr>
-          </a:p>
-        </p:txBody>
-      </p:sp>
-      <p:sp>
-        <p:nvSpPr>
-          <p:cNvPr id="26" name="Rectangle 25">
-            <a:extLst>
-              <a:ext uri="{FF2B5EF4-FFF2-40B4-BE49-F238E27FC236}">
-                <a16:creationId xmlns:a16="http://schemas.microsoft.com/office/drawing/2014/main" id="{1D3933F5-63CD-4782-BD57-12EE77EDB6C7}"/>
-              </a:ext>
-            </a:extLst>
-          </p:cNvPr>
-          <p:cNvSpPr/>
-          <p:nvPr/>
-        </p:nvSpPr>
-        <p:spPr>
-          <a:xfrm>
-            <a:off x="16570" y="33868"/>
-            <a:ext cx="1914724" cy="3005472"/>
-          </a:xfrm>
-          <a:prstGeom prst="rect">
-            <a:avLst/>
-          </a:prstGeom>
-          <a:noFill/>
-          <a:ln>
-            <a:solidFill>
-              <a:schemeClr val="tx1"/>
-            </a:solidFill>
-          </a:ln>
-        </p:spPr>
-        <p:style>
-          <a:lnRef idx="2">
-            <a:schemeClr val="accent1">
-              <a:shade val="50000"/>
-            </a:schemeClr>
-          </a:lnRef>
-          <a:fillRef idx="1">
-            <a:schemeClr val="accent1"/>
-          </a:fillRef>
-          <a:effectRef idx="0">
-            <a:schemeClr val="accent1"/>
-          </a:effectRef>
-          <a:fontRef idx="minor">
-            <a:schemeClr val="lt1"/>
-          </a:fontRef>
-        </p:style>
-        <p:txBody>
-          <a:bodyPr rtlCol="0" anchor="ctr"/>
-          <a:lstStyle/>
-          <a:p>
-            <a:pPr algn="ctr"/>
-            <a:endParaRPr lang="en-US" sz="800" b="1" dirty="0">
-              <a:latin typeface="Arial Narrow" panose="020B0606020202030204" pitchFamily="34" charset="0"/>
-            </a:endParaRPr>
-          </a:p>
-        </p:txBody>
-      </p:sp>
-      <p:sp>
-        <p:nvSpPr>
-          <p:cNvPr id="17" name="ID">
-            <a:extLst>
-              <a:ext uri="{FF2B5EF4-FFF2-40B4-BE49-F238E27FC236}">
-                <a16:creationId xmlns:a16="http://schemas.microsoft.com/office/drawing/2014/main" id="{A78EBDF8-1EBE-481C-88A9-8FB1E1F41C79}"/>
-              </a:ext>
-            </a:extLst>
-          </p:cNvPr>
-          <p:cNvSpPr txBox="1"/>
-          <p:nvPr/>
-        </p:nvSpPr>
-        <p:spPr>
-          <a:xfrm>
-            <a:off x="790306" y="1129531"/>
-            <a:ext cx="554053" cy="112520"/>
+            <a:off x="774873" y="1570936"/>
+            <a:ext cx="1054646" cy="120281"/>
           </a:xfrm>
           <a:prstGeom prst="rect">
             <a:avLst/>
@@ -4988,34 +5933,21 @@
           </a:lstStyle>
           <a:p>
             <a:r>
-              <a:rPr lang="hi-IN" sz="800" b="1" dirty="0">
-                <a:effectLst/>
+              <a:rPr lang="en-US" sz="800" dirty="0">
                 <a:latin typeface="Arial Narrow" panose="020B0606020202030204" pitchFamily="34" charset="0"/>
-                <a:ea typeface="Arial" panose="020B0604020202020204" pitchFamily="34" charset="0"/>
+                <a:cs typeface="Arial" panose="020B0604020202020204" pitchFamily="34" charset="0"/>
               </a:rPr>
-              <a:t>कार्ड नंबर</a:t>
-            </a:r>
-            <a:r>
-              <a:rPr lang="en-US" sz="800" b="1" dirty="0">
-                <a:effectLst/>
-                <a:latin typeface="Arial Narrow" panose="020B0606020202030204" pitchFamily="34" charset="0"/>
-                <a:ea typeface="Arial" panose="020B0604020202020204" pitchFamily="34" charset="0"/>
-              </a:rPr>
-              <a:t>:	</a:t>
-            </a:r>
-            <a:endParaRPr lang="en-US" sz="800" b="1" dirty="0">
-              <a:latin typeface="Arial Narrow" panose="020B0606020202030204" pitchFamily="34" charset="0"/>
-              <a:cs typeface="Arial" panose="020B0604020202020204" pitchFamily="34" charset="0"/>
-            </a:endParaRPr>
-          </a:p>
-        </p:txBody>
-      </p:sp>
-      <p:sp>
-        <p:nvSpPr>
-          <p:cNvPr id="19" name="ID">
+              <a:t>{Plant}</a:t>
+            </a:r>
+          </a:p>
+        </p:txBody>
+      </p:sp>
+      <p:sp>
+        <p:nvSpPr>
+          <p:cNvPr id="40" name="Name">
             <a:extLst>
               <a:ext uri="{FF2B5EF4-FFF2-40B4-BE49-F238E27FC236}">
-                <a16:creationId xmlns:a16="http://schemas.microsoft.com/office/drawing/2014/main" id="{B9E2181F-5D30-40E5-81CE-4DC7D47D1745}"/>
+                <a16:creationId xmlns:a16="http://schemas.microsoft.com/office/drawing/2014/main" id="{DDB1A9BE-FA27-4258-B8EB-8569D945878E}"/>
               </a:ext>
             </a:extLst>
           </p:cNvPr>
@@ -5024,13 +5956,15 @@
         </p:nvSpPr>
         <p:spPr>
           <a:xfrm>
-            <a:off x="796394" y="1261376"/>
-            <a:ext cx="523281" cy="112520"/>
+            <a:off x="763147" y="2036078"/>
+            <a:ext cx="1028638" cy="156887"/>
           </a:xfrm>
           <a:prstGeom prst="rect">
             <a:avLst/>
           </a:prstGeom>
-          <a:noFill/>
+          <a:solidFill>
+            <a:schemeClr val="bg1"/>
+          </a:solidFill>
           <a:ln w="9525" cmpd="sng">
             <a:noFill/>
           </a:ln>
@@ -5145,32 +6079,35 @@
           </a:lstStyle>
           <a:p>
             <a:r>
-              <a:rPr lang="hi-IN" sz="800" b="1" dirty="0">
+              <a:rPr lang="en-US" sz="800" dirty="0">
                 <a:latin typeface="Arial Narrow" panose="020B0606020202030204" pitchFamily="34" charset="0"/>
+                <a:cs typeface="Arial" panose="020B0604020202020204" pitchFamily="34" charset="0"/>
               </a:rPr>
-              <a:t>रक्त समूह</a:t>
-            </a:r>
-            <a:r>
-              <a:rPr lang="en-US" sz="800" b="1" dirty="0">
-                <a:effectLst/>
+              <a:t>{</a:t>
+            </a:r>
+            <a:r>
+              <a:rPr lang="en-US" sz="800" dirty="0" err="1">
                 <a:latin typeface="Arial Narrow" panose="020B0606020202030204" pitchFamily="34" charset="0"/>
-                <a:ea typeface="Arial" panose="020B0604020202020204" pitchFamily="34" charset="0"/>
+                <a:cs typeface="Arial" panose="020B0604020202020204" pitchFamily="34" charset="0"/>
               </a:rPr>
-              <a:t>:</a:t>
-            </a:r>
-            <a:endParaRPr lang="en-US" sz="800" b="1" dirty="0">
-              <a:latin typeface="Arial Narrow" panose="020B0606020202030204" pitchFamily="34" charset="0"/>
-              <a:cs typeface="Arial" panose="020B0604020202020204" pitchFamily="34" charset="0"/>
-            </a:endParaRPr>
-          </a:p>
-        </p:txBody>
-      </p:sp>
-      <p:sp>
-        <p:nvSpPr>
-          <p:cNvPr id="20" name="BloodGroup">
+              <a:t>PhoneNumber</a:t>
+            </a:r>
+            <a:r>
+              <a:rPr lang="en-US" sz="800" dirty="0">
+                <a:latin typeface="Arial Narrow" panose="020B0606020202030204" pitchFamily="34" charset="0"/>
+                <a:cs typeface="Arial" panose="020B0604020202020204" pitchFamily="34" charset="0"/>
+              </a:rPr>
+              <a:t>}</a:t>
+            </a:r>
+          </a:p>
+        </p:txBody>
+      </p:sp>
+      <p:sp>
+        <p:nvSpPr>
+          <p:cNvPr id="41" name="PermanentAddress">
             <a:extLst>
               <a:ext uri="{FF2B5EF4-FFF2-40B4-BE49-F238E27FC236}">
-                <a16:creationId xmlns:a16="http://schemas.microsoft.com/office/drawing/2014/main" id="{61EB8762-CC20-4BE5-B3F7-2E8AAF846E44}"/>
+                <a16:creationId xmlns:a16="http://schemas.microsoft.com/office/drawing/2014/main" id="{52654B56-B2A0-4972-BA51-5DA4D37D9E9D}"/>
               </a:ext>
             </a:extLst>
           </p:cNvPr>
@@ -5179,13 +6116,15 @@
         </p:nvSpPr>
         <p:spPr>
           <a:xfrm>
-            <a:off x="1248379" y="1240594"/>
-            <a:ext cx="560798" cy="132913"/>
+            <a:off x="295835" y="2193247"/>
+            <a:ext cx="938937" cy="451507"/>
           </a:xfrm>
           <a:prstGeom prst="rect">
             <a:avLst/>
           </a:prstGeom>
-          <a:noFill/>
+          <a:solidFill>
+            <a:schemeClr val="lt1"/>
+          </a:solidFill>
           <a:ln w="9525" cmpd="sng">
             <a:noFill/>
           </a:ln>
@@ -5205,449 +6144,6 @@
           </a:fontRef>
         </p:style>
         <p:txBody>
-          <a:bodyPr wrap="square" lIns="0" tIns="0" rIns="0" bIns="0" rtlCol="0" anchor="ctr"/>
-          <a:lstStyle>
-            <a:lvl1pPr marL="0" indent="0">
-              <a:defRPr sz="1100">
-                <a:solidFill>
-                  <a:schemeClr val="dk1"/>
-                </a:solidFill>
-                <a:latin typeface="+mn-lt"/>
-                <a:ea typeface="+mn-ea"/>
-                <a:cs typeface="+mn-cs"/>
-              </a:defRPr>
-            </a:lvl1pPr>
-            <a:lvl2pPr marL="457200" indent="0">
-              <a:defRPr sz="1100">
-                <a:solidFill>
-                  <a:schemeClr val="dk1"/>
-                </a:solidFill>
-                <a:latin typeface="+mn-lt"/>
-                <a:ea typeface="+mn-ea"/>
-                <a:cs typeface="+mn-cs"/>
-              </a:defRPr>
-            </a:lvl2pPr>
-            <a:lvl3pPr marL="914400" indent="0">
-              <a:defRPr sz="1100">
-                <a:solidFill>
-                  <a:schemeClr val="dk1"/>
-                </a:solidFill>
-                <a:latin typeface="+mn-lt"/>
-                <a:ea typeface="+mn-ea"/>
-                <a:cs typeface="+mn-cs"/>
-              </a:defRPr>
-            </a:lvl3pPr>
-            <a:lvl4pPr marL="1371600" indent="0">
-              <a:defRPr sz="1100">
-                <a:solidFill>
-                  <a:schemeClr val="dk1"/>
-                </a:solidFill>
-                <a:latin typeface="+mn-lt"/>
-                <a:ea typeface="+mn-ea"/>
-                <a:cs typeface="+mn-cs"/>
-              </a:defRPr>
-            </a:lvl4pPr>
-            <a:lvl5pPr marL="1828800" indent="0">
-              <a:defRPr sz="1100">
-                <a:solidFill>
-                  <a:schemeClr val="dk1"/>
-                </a:solidFill>
-                <a:latin typeface="+mn-lt"/>
-                <a:ea typeface="+mn-ea"/>
-                <a:cs typeface="+mn-cs"/>
-              </a:defRPr>
-            </a:lvl5pPr>
-            <a:lvl6pPr marL="2286000" indent="0">
-              <a:defRPr sz="1100">
-                <a:solidFill>
-                  <a:schemeClr val="dk1"/>
-                </a:solidFill>
-                <a:latin typeface="+mn-lt"/>
-                <a:ea typeface="+mn-ea"/>
-                <a:cs typeface="+mn-cs"/>
-              </a:defRPr>
-            </a:lvl6pPr>
-            <a:lvl7pPr marL="2743200" indent="0">
-              <a:defRPr sz="1100">
-                <a:solidFill>
-                  <a:schemeClr val="dk1"/>
-                </a:solidFill>
-                <a:latin typeface="+mn-lt"/>
-                <a:ea typeface="+mn-ea"/>
-                <a:cs typeface="+mn-cs"/>
-              </a:defRPr>
-            </a:lvl7pPr>
-            <a:lvl8pPr marL="3200400" indent="0">
-              <a:defRPr sz="1100">
-                <a:solidFill>
-                  <a:schemeClr val="dk1"/>
-                </a:solidFill>
-                <a:latin typeface="+mn-lt"/>
-                <a:ea typeface="+mn-ea"/>
-                <a:cs typeface="+mn-cs"/>
-              </a:defRPr>
-            </a:lvl8pPr>
-            <a:lvl9pPr marL="3657600" indent="0">
-              <a:defRPr sz="1100">
-                <a:solidFill>
-                  <a:schemeClr val="dk1"/>
-                </a:solidFill>
-                <a:latin typeface="+mn-lt"/>
-                <a:ea typeface="+mn-ea"/>
-                <a:cs typeface="+mn-cs"/>
-              </a:defRPr>
-            </a:lvl9pPr>
-          </a:lstStyle>
-          <a:p>
-            <a:r>
-              <a:rPr lang="en-US" sz="800" dirty="0">
-                <a:latin typeface="Arial Narrow" panose="020B0606020202030204" pitchFamily="34" charset="0"/>
-                <a:cs typeface="Aharoni" panose="02010803020104030203" pitchFamily="2" charset="-79"/>
-              </a:rPr>
-              <a:t>{BloodGroup}</a:t>
-            </a:r>
-          </a:p>
-        </p:txBody>
-      </p:sp>
-      <p:sp>
-        <p:nvSpPr>
-          <p:cNvPr id="21" name="DOJ">
-            <a:extLst>
-              <a:ext uri="{FF2B5EF4-FFF2-40B4-BE49-F238E27FC236}">
-                <a16:creationId xmlns:a16="http://schemas.microsoft.com/office/drawing/2014/main" id="{D1342B58-F378-400D-A011-E27FC2444B17}"/>
-              </a:ext>
-            </a:extLst>
-          </p:cNvPr>
-          <p:cNvSpPr txBox="1"/>
-          <p:nvPr/>
-        </p:nvSpPr>
-        <p:spPr>
-          <a:xfrm>
-            <a:off x="777148" y="1816331"/>
-            <a:ext cx="942017" cy="117276"/>
-          </a:xfrm>
-          <a:prstGeom prst="rect">
-            <a:avLst/>
-          </a:prstGeom>
-          <a:noFill/>
-          <a:ln w="9525" cmpd="sng">
-            <a:noFill/>
-          </a:ln>
-        </p:spPr>
-        <p:style>
-          <a:lnRef idx="0">
-            <a:scrgbClr r="0" g="0" b="0"/>
-          </a:lnRef>
-          <a:fillRef idx="0">
-            <a:scrgbClr r="0" g="0" b="0"/>
-          </a:fillRef>
-          <a:effectRef idx="0">
-            <a:scrgbClr r="0" g="0" b="0"/>
-          </a:effectRef>
-          <a:fontRef idx="minor">
-            <a:schemeClr val="dk1"/>
-          </a:fontRef>
-        </p:style>
-        <p:txBody>
-          <a:bodyPr wrap="square" lIns="0" tIns="0" rIns="0" bIns="0" rtlCol="0" anchor="ctr"/>
-          <a:lstStyle>
-            <a:lvl1pPr marL="0" indent="0">
-              <a:defRPr sz="1100">
-                <a:solidFill>
-                  <a:schemeClr val="dk1"/>
-                </a:solidFill>
-                <a:latin typeface="+mn-lt"/>
-                <a:ea typeface="+mn-ea"/>
-                <a:cs typeface="+mn-cs"/>
-              </a:defRPr>
-            </a:lvl1pPr>
-            <a:lvl2pPr marL="457200" indent="0">
-              <a:defRPr sz="1100">
-                <a:solidFill>
-                  <a:schemeClr val="dk1"/>
-                </a:solidFill>
-                <a:latin typeface="+mn-lt"/>
-                <a:ea typeface="+mn-ea"/>
-                <a:cs typeface="+mn-cs"/>
-              </a:defRPr>
-            </a:lvl2pPr>
-            <a:lvl3pPr marL="914400" indent="0">
-              <a:defRPr sz="1100">
-                <a:solidFill>
-                  <a:schemeClr val="dk1"/>
-                </a:solidFill>
-                <a:latin typeface="+mn-lt"/>
-                <a:ea typeface="+mn-ea"/>
-                <a:cs typeface="+mn-cs"/>
-              </a:defRPr>
-            </a:lvl3pPr>
-            <a:lvl4pPr marL="1371600" indent="0">
-              <a:defRPr sz="1100">
-                <a:solidFill>
-                  <a:schemeClr val="dk1"/>
-                </a:solidFill>
-                <a:latin typeface="+mn-lt"/>
-                <a:ea typeface="+mn-ea"/>
-                <a:cs typeface="+mn-cs"/>
-              </a:defRPr>
-            </a:lvl4pPr>
-            <a:lvl5pPr marL="1828800" indent="0">
-              <a:defRPr sz="1100">
-                <a:solidFill>
-                  <a:schemeClr val="dk1"/>
-                </a:solidFill>
-                <a:latin typeface="+mn-lt"/>
-                <a:ea typeface="+mn-ea"/>
-                <a:cs typeface="+mn-cs"/>
-              </a:defRPr>
-            </a:lvl5pPr>
-            <a:lvl6pPr marL="2286000" indent="0">
-              <a:defRPr sz="1100">
-                <a:solidFill>
-                  <a:schemeClr val="dk1"/>
-                </a:solidFill>
-                <a:latin typeface="+mn-lt"/>
-                <a:ea typeface="+mn-ea"/>
-                <a:cs typeface="+mn-cs"/>
-              </a:defRPr>
-            </a:lvl6pPr>
-            <a:lvl7pPr marL="2743200" indent="0">
-              <a:defRPr sz="1100">
-                <a:solidFill>
-                  <a:schemeClr val="dk1"/>
-                </a:solidFill>
-                <a:latin typeface="+mn-lt"/>
-                <a:ea typeface="+mn-ea"/>
-                <a:cs typeface="+mn-cs"/>
-              </a:defRPr>
-            </a:lvl7pPr>
-            <a:lvl8pPr marL="3200400" indent="0">
-              <a:defRPr sz="1100">
-                <a:solidFill>
-                  <a:schemeClr val="dk1"/>
-                </a:solidFill>
-                <a:latin typeface="+mn-lt"/>
-                <a:ea typeface="+mn-ea"/>
-                <a:cs typeface="+mn-cs"/>
-              </a:defRPr>
-            </a:lvl8pPr>
-            <a:lvl9pPr marL="3657600" indent="0">
-              <a:defRPr sz="1100">
-                <a:solidFill>
-                  <a:schemeClr val="dk1"/>
-                </a:solidFill>
-                <a:latin typeface="+mn-lt"/>
-                <a:ea typeface="+mn-ea"/>
-                <a:cs typeface="+mn-cs"/>
-              </a:defRPr>
-            </a:lvl9pPr>
-          </a:lstStyle>
-          <a:p>
-            <a:r>
-              <a:rPr lang="en-US" sz="800" dirty="0">
-                <a:latin typeface="Arial Narrow" panose="020B0606020202030204" pitchFamily="34" charset="0"/>
-                <a:cs typeface="Aharoni" panose="02010803020104030203" pitchFamily="2" charset="-79"/>
-              </a:rPr>
-              <a:t>{DOB}</a:t>
-            </a:r>
-          </a:p>
-        </p:txBody>
-      </p:sp>
-      <p:sp>
-        <p:nvSpPr>
-          <p:cNvPr id="24" name="Department">
-            <a:extLst>
-              <a:ext uri="{FF2B5EF4-FFF2-40B4-BE49-F238E27FC236}">
-                <a16:creationId xmlns:a16="http://schemas.microsoft.com/office/drawing/2014/main" id="{6F2E698A-909E-4F59-B369-CC2E5FF326ED}"/>
-              </a:ext>
-            </a:extLst>
-          </p:cNvPr>
-          <p:cNvSpPr txBox="1"/>
-          <p:nvPr/>
-        </p:nvSpPr>
-        <p:spPr>
-          <a:xfrm>
-            <a:off x="75018" y="2081567"/>
-            <a:ext cx="848583" cy="72091"/>
-          </a:xfrm>
-          <a:prstGeom prst="rect">
-            <a:avLst/>
-          </a:prstGeom>
-          <a:noFill/>
-          <a:ln w="9525" cmpd="sng">
-            <a:noFill/>
-          </a:ln>
-        </p:spPr>
-        <p:style>
-          <a:lnRef idx="0">
-            <a:scrgbClr r="0" g="0" b="0"/>
-          </a:lnRef>
-          <a:fillRef idx="0">
-            <a:scrgbClr r="0" g="0" b="0"/>
-          </a:fillRef>
-          <a:effectRef idx="0">
-            <a:scrgbClr r="0" g="0" b="0"/>
-          </a:effectRef>
-          <a:fontRef idx="minor">
-            <a:schemeClr val="dk1"/>
-          </a:fontRef>
-        </p:style>
-        <p:txBody>
-          <a:bodyPr wrap="square" lIns="0" tIns="0" rIns="0" bIns="0" rtlCol="0" anchor="ctr"/>
-          <a:lstStyle>
-            <a:lvl1pPr marL="0" indent="0">
-              <a:defRPr sz="1100">
-                <a:solidFill>
-                  <a:schemeClr val="dk1"/>
-                </a:solidFill>
-                <a:latin typeface="+mn-lt"/>
-                <a:ea typeface="+mn-ea"/>
-                <a:cs typeface="+mn-cs"/>
-              </a:defRPr>
-            </a:lvl1pPr>
-            <a:lvl2pPr marL="457200" indent="0">
-              <a:defRPr sz="1100">
-                <a:solidFill>
-                  <a:schemeClr val="dk1"/>
-                </a:solidFill>
-                <a:latin typeface="+mn-lt"/>
-                <a:ea typeface="+mn-ea"/>
-                <a:cs typeface="+mn-cs"/>
-              </a:defRPr>
-            </a:lvl2pPr>
-            <a:lvl3pPr marL="914400" indent="0">
-              <a:defRPr sz="1100">
-                <a:solidFill>
-                  <a:schemeClr val="dk1"/>
-                </a:solidFill>
-                <a:latin typeface="+mn-lt"/>
-                <a:ea typeface="+mn-ea"/>
-                <a:cs typeface="+mn-cs"/>
-              </a:defRPr>
-            </a:lvl3pPr>
-            <a:lvl4pPr marL="1371600" indent="0">
-              <a:defRPr sz="1100">
-                <a:solidFill>
-                  <a:schemeClr val="dk1"/>
-                </a:solidFill>
-                <a:latin typeface="+mn-lt"/>
-                <a:ea typeface="+mn-ea"/>
-                <a:cs typeface="+mn-cs"/>
-              </a:defRPr>
-            </a:lvl4pPr>
-            <a:lvl5pPr marL="1828800" indent="0">
-              <a:defRPr sz="1100">
-                <a:solidFill>
-                  <a:schemeClr val="dk1"/>
-                </a:solidFill>
-                <a:latin typeface="+mn-lt"/>
-                <a:ea typeface="+mn-ea"/>
-                <a:cs typeface="+mn-cs"/>
-              </a:defRPr>
-            </a:lvl5pPr>
-            <a:lvl6pPr marL="2286000" indent="0">
-              <a:defRPr sz="1100">
-                <a:solidFill>
-                  <a:schemeClr val="dk1"/>
-                </a:solidFill>
-                <a:latin typeface="+mn-lt"/>
-                <a:ea typeface="+mn-ea"/>
-                <a:cs typeface="+mn-cs"/>
-              </a:defRPr>
-            </a:lvl6pPr>
-            <a:lvl7pPr marL="2743200" indent="0">
-              <a:defRPr sz="1100">
-                <a:solidFill>
-                  <a:schemeClr val="dk1"/>
-                </a:solidFill>
-                <a:latin typeface="+mn-lt"/>
-                <a:ea typeface="+mn-ea"/>
-                <a:cs typeface="+mn-cs"/>
-              </a:defRPr>
-            </a:lvl7pPr>
-            <a:lvl8pPr marL="3200400" indent="0">
-              <a:defRPr sz="1100">
-                <a:solidFill>
-                  <a:schemeClr val="dk1"/>
-                </a:solidFill>
-                <a:latin typeface="+mn-lt"/>
-                <a:ea typeface="+mn-ea"/>
-                <a:cs typeface="+mn-cs"/>
-              </a:defRPr>
-            </a:lvl8pPr>
-            <a:lvl9pPr marL="3657600" indent="0">
-              <a:defRPr sz="1100">
-                <a:solidFill>
-                  <a:schemeClr val="dk1"/>
-                </a:solidFill>
-                <a:latin typeface="+mn-lt"/>
-                <a:ea typeface="+mn-ea"/>
-                <a:cs typeface="+mn-cs"/>
-              </a:defRPr>
-            </a:lvl9pPr>
-          </a:lstStyle>
-          <a:p>
-            <a:r>
-              <a:rPr lang="hi-IN" sz="800" b="1" dirty="0">
-                <a:latin typeface="Arial Narrow" panose="020B0606020202030204" pitchFamily="34" charset="0"/>
-              </a:rPr>
-              <a:t>आपातकालीन फोन</a:t>
-            </a:r>
-            <a:r>
-              <a:rPr lang="en-US" sz="800" b="1" dirty="0">
-                <a:latin typeface="Arial Narrow" panose="020B0606020202030204" pitchFamily="34" charset="0"/>
-              </a:rPr>
-              <a:t>:</a:t>
-            </a:r>
-            <a:endParaRPr lang="en-US" sz="800" b="1" dirty="0">
-              <a:latin typeface="Arial Narrow" panose="020B0606020202030204" pitchFamily="34" charset="0"/>
-              <a:cs typeface="Arial" panose="020B0604020202020204" pitchFamily="34" charset="0"/>
-            </a:endParaRPr>
-          </a:p>
-        </p:txBody>
-      </p:sp>
-      <p:sp>
-        <p:nvSpPr>
-          <p:cNvPr id="27" name="PermanentAddress">
-            <a:extLst>
-              <a:ext uri="{FF2B5EF4-FFF2-40B4-BE49-F238E27FC236}">
-                <a16:creationId xmlns:a16="http://schemas.microsoft.com/office/drawing/2014/main" id="{67C3A2FE-F9BF-4E53-90CA-8748A39E5D1C}"/>
-              </a:ext>
-            </a:extLst>
-          </p:cNvPr>
-          <p:cNvSpPr txBox="1"/>
-          <p:nvPr/>
-        </p:nvSpPr>
-        <p:spPr>
-          <a:xfrm>
-            <a:off x="298562" y="2192875"/>
-            <a:ext cx="1550263" cy="256214"/>
-          </a:xfrm>
-          <a:prstGeom prst="rect">
-            <a:avLst/>
-          </a:prstGeom>
-          <a:solidFill>
-            <a:schemeClr val="lt1"/>
-          </a:solidFill>
-          <a:ln w="9525" cmpd="sng">
-            <a:noFill/>
-          </a:ln>
-        </p:spPr>
-        <p:style>
-          <a:lnRef idx="0">
-            <a:scrgbClr r="0" g="0" b="0"/>
-          </a:lnRef>
-          <a:fillRef idx="0">
-            <a:scrgbClr r="0" g="0" b="0"/>
-          </a:fillRef>
-          <a:effectRef idx="0">
-            <a:scrgbClr r="0" g="0" b="0"/>
-          </a:effectRef>
-          <a:fontRef idx="minor">
-            <a:schemeClr val="dk1"/>
-          </a:fontRef>
-        </p:style>
-        <p:txBody>
           <a:bodyPr wrap="square" lIns="0" tIns="0" rIns="0" bIns="0" rtlCol="0" anchor="t"/>
           <a:lstStyle>
             <a:lvl1pPr marL="0" indent="0">
@@ -5766,461 +6262,12 @@
           </a:p>
         </p:txBody>
       </p:sp>
-      <p:sp>
-        <p:nvSpPr>
-          <p:cNvPr id="28" name="Name">
-            <a:extLst>
-              <a:ext uri="{FF2B5EF4-FFF2-40B4-BE49-F238E27FC236}">
-                <a16:creationId xmlns:a16="http://schemas.microsoft.com/office/drawing/2014/main" id="{52CFE58F-A7EA-4BA3-9851-E20D1B246B99}"/>
-              </a:ext>
-            </a:extLst>
-          </p:cNvPr>
-          <p:cNvSpPr txBox="1"/>
-          <p:nvPr/>
-        </p:nvSpPr>
-        <p:spPr>
-          <a:xfrm>
-            <a:off x="917728" y="2023301"/>
-            <a:ext cx="965649" cy="156887"/>
-          </a:xfrm>
-          <a:prstGeom prst="rect">
-            <a:avLst/>
-          </a:prstGeom>
-          <a:solidFill>
-            <a:schemeClr val="bg1"/>
-          </a:solidFill>
-          <a:ln w="9525" cmpd="sng">
-            <a:noFill/>
-          </a:ln>
-        </p:spPr>
-        <p:style>
-          <a:lnRef idx="0">
-            <a:scrgbClr r="0" g="0" b="0"/>
-          </a:lnRef>
-          <a:fillRef idx="0">
-            <a:scrgbClr r="0" g="0" b="0"/>
-          </a:fillRef>
-          <a:effectRef idx="0">
-            <a:scrgbClr r="0" g="0" b="0"/>
-          </a:effectRef>
-          <a:fontRef idx="minor">
-            <a:schemeClr val="dk1"/>
-          </a:fontRef>
-        </p:style>
-        <p:txBody>
-          <a:bodyPr wrap="square" lIns="0" tIns="0" rIns="0" bIns="0" rtlCol="0" anchor="ctr"/>
-          <a:lstStyle>
-            <a:lvl1pPr marL="0" indent="0">
-              <a:defRPr sz="1100">
-                <a:solidFill>
-                  <a:schemeClr val="dk1"/>
-                </a:solidFill>
-                <a:latin typeface="+mn-lt"/>
-                <a:ea typeface="+mn-ea"/>
-                <a:cs typeface="+mn-cs"/>
-              </a:defRPr>
-            </a:lvl1pPr>
-            <a:lvl2pPr marL="457200" indent="0">
-              <a:defRPr sz="1100">
-                <a:solidFill>
-                  <a:schemeClr val="dk1"/>
-                </a:solidFill>
-                <a:latin typeface="+mn-lt"/>
-                <a:ea typeface="+mn-ea"/>
-                <a:cs typeface="+mn-cs"/>
-              </a:defRPr>
-            </a:lvl2pPr>
-            <a:lvl3pPr marL="914400" indent="0">
-              <a:defRPr sz="1100">
-                <a:solidFill>
-                  <a:schemeClr val="dk1"/>
-                </a:solidFill>
-                <a:latin typeface="+mn-lt"/>
-                <a:ea typeface="+mn-ea"/>
-                <a:cs typeface="+mn-cs"/>
-              </a:defRPr>
-            </a:lvl3pPr>
-            <a:lvl4pPr marL="1371600" indent="0">
-              <a:defRPr sz="1100">
-                <a:solidFill>
-                  <a:schemeClr val="dk1"/>
-                </a:solidFill>
-                <a:latin typeface="+mn-lt"/>
-                <a:ea typeface="+mn-ea"/>
-                <a:cs typeface="+mn-cs"/>
-              </a:defRPr>
-            </a:lvl4pPr>
-            <a:lvl5pPr marL="1828800" indent="0">
-              <a:defRPr sz="1100">
-                <a:solidFill>
-                  <a:schemeClr val="dk1"/>
-                </a:solidFill>
-                <a:latin typeface="+mn-lt"/>
-                <a:ea typeface="+mn-ea"/>
-                <a:cs typeface="+mn-cs"/>
-              </a:defRPr>
-            </a:lvl5pPr>
-            <a:lvl6pPr marL="2286000" indent="0">
-              <a:defRPr sz="1100">
-                <a:solidFill>
-                  <a:schemeClr val="dk1"/>
-                </a:solidFill>
-                <a:latin typeface="+mn-lt"/>
-                <a:ea typeface="+mn-ea"/>
-                <a:cs typeface="+mn-cs"/>
-              </a:defRPr>
-            </a:lvl6pPr>
-            <a:lvl7pPr marL="2743200" indent="0">
-              <a:defRPr sz="1100">
-                <a:solidFill>
-                  <a:schemeClr val="dk1"/>
-                </a:solidFill>
-                <a:latin typeface="+mn-lt"/>
-                <a:ea typeface="+mn-ea"/>
-                <a:cs typeface="+mn-cs"/>
-              </a:defRPr>
-            </a:lvl7pPr>
-            <a:lvl8pPr marL="3200400" indent="0">
-              <a:defRPr sz="1100">
-                <a:solidFill>
-                  <a:schemeClr val="dk1"/>
-                </a:solidFill>
-                <a:latin typeface="+mn-lt"/>
-                <a:ea typeface="+mn-ea"/>
-                <a:cs typeface="+mn-cs"/>
-              </a:defRPr>
-            </a:lvl8pPr>
-            <a:lvl9pPr marL="3657600" indent="0">
-              <a:defRPr sz="1100">
-                <a:solidFill>
-                  <a:schemeClr val="dk1"/>
-                </a:solidFill>
-                <a:latin typeface="+mn-lt"/>
-                <a:ea typeface="+mn-ea"/>
-                <a:cs typeface="+mn-cs"/>
-              </a:defRPr>
-            </a:lvl9pPr>
-          </a:lstStyle>
-          <a:p>
-            <a:r>
-              <a:rPr lang="en-US" sz="800" dirty="0">
-                <a:latin typeface="Arial Narrow" panose="020B0606020202030204" pitchFamily="34" charset="0"/>
-                <a:cs typeface="Arial" panose="020B0604020202020204" pitchFamily="34" charset="0"/>
-              </a:rPr>
-              <a:t>{</a:t>
-            </a:r>
-            <a:r>
-              <a:rPr lang="en-US" sz="800" dirty="0" err="1">
-                <a:latin typeface="Arial Narrow" panose="020B0606020202030204" pitchFamily="34" charset="0"/>
-                <a:cs typeface="Arial" panose="020B0604020202020204" pitchFamily="34" charset="0"/>
-              </a:rPr>
-              <a:t>EmergencyTelNo</a:t>
-            </a:r>
-            <a:r>
-              <a:rPr lang="en-US" sz="800" dirty="0">
-                <a:latin typeface="Arial Narrow" panose="020B0606020202030204" pitchFamily="34" charset="0"/>
-                <a:cs typeface="Arial" panose="020B0604020202020204" pitchFamily="34" charset="0"/>
-              </a:rPr>
-              <a:t>}</a:t>
-            </a:r>
-          </a:p>
-        </p:txBody>
-      </p:sp>
-      <p:sp>
-        <p:nvSpPr>
-          <p:cNvPr id="29" name="TextBox 28">
-            <a:extLst>
-              <a:ext uri="{FF2B5EF4-FFF2-40B4-BE49-F238E27FC236}">
-                <a16:creationId xmlns:a16="http://schemas.microsoft.com/office/drawing/2014/main" id="{6D610A8B-7CE8-4394-B052-B32EC31B152E}"/>
-              </a:ext>
-            </a:extLst>
-          </p:cNvPr>
-          <p:cNvSpPr txBox="1"/>
-          <p:nvPr/>
-        </p:nvSpPr>
-        <p:spPr>
-          <a:xfrm>
-            <a:off x="678519" y="1891482"/>
-            <a:ext cx="1204858" cy="215444"/>
-          </a:xfrm>
-          <a:prstGeom prst="rect">
-            <a:avLst/>
-          </a:prstGeom>
-          <a:noFill/>
-        </p:spPr>
-        <p:txBody>
-          <a:bodyPr wrap="square">
-            <a:spAutoFit/>
-          </a:bodyPr>
-          <a:lstStyle/>
-          <a:p>
-            <a:r>
-              <a:rPr lang="en-US" sz="800" dirty="0">
-                <a:effectLst/>
-                <a:latin typeface="Arial Narrow" panose="020B0606020202030204" pitchFamily="34" charset="0"/>
-                <a:ea typeface="Times New Roman" panose="02020603050405020304" pitchFamily="18" charset="0"/>
-                <a:cs typeface="Calibri Light" panose="020F0302020204030204" pitchFamily="34" charset="0"/>
-              </a:rPr>
-              <a:t>{</a:t>
-            </a:r>
-            <a:r>
-              <a:rPr lang="en-US" sz="800" dirty="0" err="1">
-                <a:effectLst/>
-                <a:latin typeface="Arial Narrow" panose="020B0606020202030204" pitchFamily="34" charset="0"/>
-                <a:ea typeface="Times New Roman" panose="02020603050405020304" pitchFamily="18" charset="0"/>
-                <a:cs typeface="Calibri Light" panose="020F0302020204030204" pitchFamily="34" charset="0"/>
-              </a:rPr>
-              <a:t>FatherName</a:t>
-            </a:r>
-            <a:r>
-              <a:rPr lang="en-US" sz="800" dirty="0">
-                <a:effectLst/>
-                <a:latin typeface="Arial Narrow" panose="020B0606020202030204" pitchFamily="34" charset="0"/>
-                <a:ea typeface="Times New Roman" panose="02020603050405020304" pitchFamily="18" charset="0"/>
-                <a:cs typeface="Calibri Light" panose="020F0302020204030204" pitchFamily="34" charset="0"/>
-              </a:rPr>
-              <a:t>}</a:t>
-            </a:r>
-            <a:endParaRPr lang="en-US" sz="800" dirty="0">
-              <a:latin typeface="Arial Narrow" panose="020B0606020202030204" pitchFamily="34" charset="0"/>
-            </a:endParaRPr>
-          </a:p>
-        </p:txBody>
-      </p:sp>
-      <p:sp>
-        <p:nvSpPr>
-          <p:cNvPr id="30" name="DOJ">
-            <a:extLst>
-              <a:ext uri="{FF2B5EF4-FFF2-40B4-BE49-F238E27FC236}">
-                <a16:creationId xmlns:a16="http://schemas.microsoft.com/office/drawing/2014/main" id="{7579A1B9-655D-4F5D-A4FA-5AE8EC09CB1B}"/>
-              </a:ext>
-            </a:extLst>
-          </p:cNvPr>
-          <p:cNvSpPr txBox="1"/>
-          <p:nvPr/>
-        </p:nvSpPr>
-        <p:spPr>
-          <a:xfrm>
-            <a:off x="774873" y="1570936"/>
-            <a:ext cx="1054646" cy="120281"/>
-          </a:xfrm>
-          <a:prstGeom prst="rect">
-            <a:avLst/>
-          </a:prstGeom>
-          <a:noFill/>
-          <a:ln w="9525" cmpd="sng">
-            <a:noFill/>
-          </a:ln>
-        </p:spPr>
-        <p:style>
-          <a:lnRef idx="0">
-            <a:scrgbClr r="0" g="0" b="0"/>
-          </a:lnRef>
-          <a:fillRef idx="0">
-            <a:scrgbClr r="0" g="0" b="0"/>
-          </a:fillRef>
-          <a:effectRef idx="0">
-            <a:scrgbClr r="0" g="0" b="0"/>
-          </a:effectRef>
-          <a:fontRef idx="minor">
-            <a:schemeClr val="dk1"/>
-          </a:fontRef>
-        </p:style>
-        <p:txBody>
-          <a:bodyPr wrap="square" lIns="0" tIns="0" rIns="0" bIns="0" rtlCol="0" anchor="ctr"/>
-          <a:lstStyle>
-            <a:lvl1pPr marL="0" indent="0">
-              <a:defRPr sz="1100">
-                <a:solidFill>
-                  <a:schemeClr val="dk1"/>
-                </a:solidFill>
-                <a:latin typeface="+mn-lt"/>
-                <a:ea typeface="+mn-ea"/>
-                <a:cs typeface="+mn-cs"/>
-              </a:defRPr>
-            </a:lvl1pPr>
-            <a:lvl2pPr marL="457200" indent="0">
-              <a:defRPr sz="1100">
-                <a:solidFill>
-                  <a:schemeClr val="dk1"/>
-                </a:solidFill>
-                <a:latin typeface="+mn-lt"/>
-                <a:ea typeface="+mn-ea"/>
-                <a:cs typeface="+mn-cs"/>
-              </a:defRPr>
-            </a:lvl2pPr>
-            <a:lvl3pPr marL="914400" indent="0">
-              <a:defRPr sz="1100">
-                <a:solidFill>
-                  <a:schemeClr val="dk1"/>
-                </a:solidFill>
-                <a:latin typeface="+mn-lt"/>
-                <a:ea typeface="+mn-ea"/>
-                <a:cs typeface="+mn-cs"/>
-              </a:defRPr>
-            </a:lvl3pPr>
-            <a:lvl4pPr marL="1371600" indent="0">
-              <a:defRPr sz="1100">
-                <a:solidFill>
-                  <a:schemeClr val="dk1"/>
-                </a:solidFill>
-                <a:latin typeface="+mn-lt"/>
-                <a:ea typeface="+mn-ea"/>
-                <a:cs typeface="+mn-cs"/>
-              </a:defRPr>
-            </a:lvl4pPr>
-            <a:lvl5pPr marL="1828800" indent="0">
-              <a:defRPr sz="1100">
-                <a:solidFill>
-                  <a:schemeClr val="dk1"/>
-                </a:solidFill>
-                <a:latin typeface="+mn-lt"/>
-                <a:ea typeface="+mn-ea"/>
-                <a:cs typeface="+mn-cs"/>
-              </a:defRPr>
-            </a:lvl5pPr>
-            <a:lvl6pPr marL="2286000" indent="0">
-              <a:defRPr sz="1100">
-                <a:solidFill>
-                  <a:schemeClr val="dk1"/>
-                </a:solidFill>
-                <a:latin typeface="+mn-lt"/>
-                <a:ea typeface="+mn-ea"/>
-                <a:cs typeface="+mn-cs"/>
-              </a:defRPr>
-            </a:lvl6pPr>
-            <a:lvl7pPr marL="2743200" indent="0">
-              <a:defRPr sz="1100">
-                <a:solidFill>
-                  <a:schemeClr val="dk1"/>
-                </a:solidFill>
-                <a:latin typeface="+mn-lt"/>
-                <a:ea typeface="+mn-ea"/>
-                <a:cs typeface="+mn-cs"/>
-              </a:defRPr>
-            </a:lvl7pPr>
-            <a:lvl8pPr marL="3200400" indent="0">
-              <a:defRPr sz="1100">
-                <a:solidFill>
-                  <a:schemeClr val="dk1"/>
-                </a:solidFill>
-                <a:latin typeface="+mn-lt"/>
-                <a:ea typeface="+mn-ea"/>
-                <a:cs typeface="+mn-cs"/>
-              </a:defRPr>
-            </a:lvl8pPr>
-            <a:lvl9pPr marL="3657600" indent="0">
-              <a:defRPr sz="1100">
-                <a:solidFill>
-                  <a:schemeClr val="dk1"/>
-                </a:solidFill>
-                <a:latin typeface="+mn-lt"/>
-                <a:ea typeface="+mn-ea"/>
-                <a:cs typeface="+mn-cs"/>
-              </a:defRPr>
-            </a:lvl9pPr>
-          </a:lstStyle>
-          <a:p>
-            <a:r>
-              <a:rPr lang="en-US" sz="800" dirty="0">
-                <a:latin typeface="Arial Narrow" panose="020B0606020202030204" pitchFamily="34" charset="0"/>
-                <a:cs typeface="Arial" panose="020B0604020202020204" pitchFamily="34" charset="0"/>
-              </a:rPr>
-              <a:t>{Plant}</a:t>
-            </a:r>
-          </a:p>
-        </p:txBody>
-      </p:sp>
-      <p:sp>
-        <p:nvSpPr>
-          <p:cNvPr id="23" name="TextBox 22">
-            <a:extLst>
-              <a:ext uri="{FF2B5EF4-FFF2-40B4-BE49-F238E27FC236}">
-                <a16:creationId xmlns:a16="http://schemas.microsoft.com/office/drawing/2014/main" id="{BD1706BE-F5A5-4206-99CD-82FB8BEFA565}"/>
-              </a:ext>
-            </a:extLst>
-          </p:cNvPr>
-          <p:cNvSpPr txBox="1"/>
-          <p:nvPr/>
-        </p:nvSpPr>
-        <p:spPr>
-          <a:xfrm>
-            <a:off x="24511" y="2774753"/>
-            <a:ext cx="1910289" cy="246221"/>
-          </a:xfrm>
-          <a:prstGeom prst="rect">
-            <a:avLst/>
-          </a:prstGeom>
-          <a:solidFill>
-            <a:srgbClr val="FF9933"/>
-          </a:solidFill>
-        </p:spPr>
-        <p:txBody>
-          <a:bodyPr wrap="square">
-            <a:spAutoFit/>
-          </a:bodyPr>
-          <a:lstStyle/>
-          <a:p>
-            <a:r>
-              <a:rPr lang="hi-IN" sz="500" dirty="0"/>
-              <a:t>प्रतिभा मुख्य प्लांट, प्लॉट नं. 4, इंडस्ट्रियल ग्रोथ सेंटर, खेड़ा,</a:t>
-            </a:r>
-            <a:r>
-              <a:rPr lang="en-US" sz="500" dirty="0"/>
-              <a:t> </a:t>
-            </a:r>
-            <a:r>
-              <a:rPr lang="hi-IN" sz="500" dirty="0"/>
-              <a:t>पीथमपुर, धार, मध्य प्रदेश, आपातकालीन फोन नंबर</a:t>
-            </a:r>
-            <a:r>
-              <a:rPr lang="en-US" sz="500" dirty="0"/>
-              <a:t> </a:t>
-            </a:r>
-            <a:r>
-              <a:rPr lang="hi-IN" sz="500" dirty="0"/>
-              <a:t>7292404319</a:t>
-            </a:r>
-            <a:endParaRPr lang="en-US" sz="500" dirty="0"/>
-          </a:p>
-        </p:txBody>
-      </p:sp>
-      <p:pic>
-        <p:nvPicPr>
-          <p:cNvPr id="31" name="EmpQR">
-            <a:extLst>
-              <a:ext uri="{FF2B5EF4-FFF2-40B4-BE49-F238E27FC236}">
-                <a16:creationId xmlns:a16="http://schemas.microsoft.com/office/drawing/2014/main" id="{DC0F8D45-F3F9-48FC-8FBB-C5A99414D13C}"/>
-              </a:ext>
-            </a:extLst>
-          </p:cNvPr>
-          <p:cNvPicPr>
-            <a:picLocks noChangeAspect="1"/>
-          </p:cNvPicPr>
-          <p:nvPr/>
-        </p:nvPicPr>
-        <p:blipFill>
-          <a:blip r:embed="rId4"/>
-          <a:stretch>
-            <a:fillRect/>
-          </a:stretch>
-        </p:blipFill>
-        <p:spPr>
-          <a:xfrm>
-            <a:off x="1178596" y="575188"/>
-            <a:ext cx="531267" cy="468701"/>
-          </a:xfrm>
-          <a:prstGeom prst="rect">
-            <a:avLst/>
-          </a:prstGeom>
-        </p:spPr>
-      </p:pic>
       <p:pic>
         <p:nvPicPr>
           <p:cNvPr id="32" name="AuthorizedSign">
             <a:extLst>
               <a:ext uri="{FF2B5EF4-FFF2-40B4-BE49-F238E27FC236}">
-                <a16:creationId xmlns:a16="http://schemas.microsoft.com/office/drawing/2014/main" id="{12099DF0-B6C7-4212-A593-0E928E1475C4}"/>
+                <a16:creationId xmlns:a16="http://schemas.microsoft.com/office/drawing/2014/main" id="{EDBC4F3B-3AF7-484D-81FD-FB52EF14E4AB}"/>
               </a:ext>
             </a:extLst>
           </p:cNvPr>
@@ -6237,7 +6284,7 @@
         </p:blipFill>
         <p:spPr>
           <a:xfrm>
-            <a:off x="1235725" y="2489364"/>
+            <a:off x="1256765" y="2327511"/>
             <a:ext cx="594472" cy="189812"/>
           </a:xfrm>
           <a:prstGeom prst="rect">
@@ -6246,11 +6293,6 @@
         </p:spPr>
       </p:pic>
     </p:spTree>
-    <p:extLst>
-      <p:ext uri="{BB962C8B-B14F-4D97-AF65-F5344CB8AC3E}">
-        <p14:creationId xmlns:p14="http://schemas.microsoft.com/office/powerpoint/2010/main" val="3596783069"/>
-      </p:ext>
-    </p:extLst>
   </p:cSld>
   <p:clrMapOvr>
     <a:masterClrMapping/>
@@ -6521,14 +6563,14 @@
 </file>
 
 <file path=ppt/theme/theme2.xml><?xml version="1.0" encoding="utf-8"?>
-<a:theme xmlns:a="http://schemas.openxmlformats.org/drawingml/2006/main" name="Office Theme">
+<a:theme xmlns:a="http://schemas.openxmlformats.org/drawingml/2006/main" name="Office">
   <a:themeElements>
     <a:clrScheme name="Office">
       <a:dk1>
-        <a:sysClr val="windowText" lastClr="000000"/>
+        <a:srgbClr val="000000"/>
       </a:dk1>
       <a:lt1>
-        <a:sysClr val="window" lastClr="FFFFFF"/>
+        <a:srgbClr val="FFFFFF"/>
       </a:lt1>
       <a:dk2>
         <a:srgbClr val="44546A"/>
@@ -6563,7 +6605,7 @@
     </a:clrScheme>
     <a:fontScheme name="Office">
       <a:majorFont>
-        <a:latin typeface="Calibri Light" panose="020F0302020204030204"/>
+        <a:latin typeface="Calibri Light"/>
         <a:ea typeface=""/>
         <a:cs typeface=""/>
         <a:font script="Jpan" typeface="游ゴシック Light"/>
@@ -6615,7 +6657,7 @@
         <a:font script="Tfng" typeface="Ebrima"/>
       </a:majorFont>
       <a:minorFont>
-        <a:latin typeface="Calibri" panose="020F0502020204030204"/>
+        <a:latin typeface="Calibri"/>
         <a:ea typeface=""/>
         <a:cs typeface=""/>
         <a:font script="Jpan" typeface="游ゴシック"/>
@@ -6696,7 +6738,7 @@
               </a:schemeClr>
             </a:gs>
           </a:gsLst>
-          <a:lin ang="5400000" scaled="0"/>
+          <a:lin ang="5400000"/>
         </a:gradFill>
         <a:gradFill rotWithShape="1">
           <a:gsLst>
@@ -6722,30 +6764,36 @@
               </a:schemeClr>
             </a:gs>
           </a:gsLst>
-          <a:lin ang="5400000" scaled="0"/>
+          <a:lin ang="5400000"/>
         </a:gradFill>
       </a:fillStyleLst>
       <a:lnStyleLst>
-        <a:ln w="6350" cap="flat" cmpd="sng" algn="ctr">
+        <a:ln w="6350" cap="flat">
           <a:solidFill>
             <a:schemeClr val="phClr"/>
           </a:solidFill>
           <a:prstDash val="solid"/>
-          <a:miter lim="800000"/>
+          <a:miter/>
+          <a:headEnd type="none"/>
+          <a:tailEnd type="none"/>
         </a:ln>
-        <a:ln w="12700" cap="flat" cmpd="sng" algn="ctr">
+        <a:ln w="12700" cap="flat">
           <a:solidFill>
             <a:schemeClr val="phClr"/>
           </a:solidFill>
           <a:prstDash val="solid"/>
-          <a:miter lim="800000"/>
+          <a:miter/>
+          <a:headEnd type="none"/>
+          <a:tailEnd type="none"/>
         </a:ln>
-        <a:ln w="19050" cap="flat" cmpd="sng" algn="ctr">
+        <a:ln w="19050" cap="flat">
           <a:solidFill>
             <a:schemeClr val="phClr"/>
           </a:solidFill>
           <a:prstDash val="solid"/>
-          <a:miter lim="800000"/>
+          <a:miter/>
+          <a:headEnd type="none"/>
+          <a:tailEnd type="none"/>
         </a:ln>
       </a:lnStyleLst>
       <a:effectStyleLst>
@@ -6800,30 +6848,25 @@
               </a:schemeClr>
             </a:gs>
           </a:gsLst>
-          <a:lin ang="5400000" scaled="0"/>
+          <a:lin ang="5400000"/>
         </a:gradFill>
       </a:bgFillStyleLst>
     </a:fmtScheme>
   </a:themeElements>
   <a:objectDefaults/>
   <a:extraClrSchemeLst/>
-  <a:extLst>
-    <a:ext uri="{05A4C25C-085E-4340-85A3-A5531E510DB2}">
-      <thm15:themeFamily xmlns:thm15="http://schemas.microsoft.com/office/thememl/2012/main" name="Office Theme" id="{62F939B6-93AF-4DB8-9C6B-D6C7DFDC589F}" vid="{4A3C46E8-61CC-4603-A589-7422A47A8E4A}"/>
-    </a:ext>
-  </a:extLst>
 </a:theme>
 </file>
 
 <file path=ppt/theme/theme3.xml><?xml version="1.0" encoding="utf-8"?>
-<a:theme xmlns:a="http://schemas.openxmlformats.org/drawingml/2006/main" name="Office Theme">
+<a:theme xmlns:a="http://schemas.openxmlformats.org/drawingml/2006/main" name="Office">
   <a:themeElements>
     <a:clrScheme name="Office">
       <a:dk1>
-        <a:sysClr val="windowText" lastClr="000000"/>
+        <a:srgbClr val="000000"/>
       </a:dk1>
       <a:lt1>
-        <a:sysClr val="window" lastClr="FFFFFF"/>
+        <a:srgbClr val="FFFFFF"/>
       </a:lt1>
       <a:dk2>
         <a:srgbClr val="44546A"/>
@@ -6858,7 +6901,7 @@
     </a:clrScheme>
     <a:fontScheme name="Office">
       <a:majorFont>
-        <a:latin typeface="Calibri Light" panose="020F0302020204030204"/>
+        <a:latin typeface="Calibri Light"/>
         <a:ea typeface=""/>
         <a:cs typeface=""/>
         <a:font script="Jpan" typeface="游ゴシック Light"/>
@@ -6910,7 +6953,7 @@
         <a:font script="Tfng" typeface="Ebrima"/>
       </a:majorFont>
       <a:minorFont>
-        <a:latin typeface="Calibri" panose="020F0502020204030204"/>
+        <a:latin typeface="Calibri"/>
         <a:ea typeface=""/>
         <a:cs typeface=""/>
         <a:font script="Jpan" typeface="游ゴシック"/>
@@ -6991,7 +7034,7 @@
               </a:schemeClr>
             </a:gs>
           </a:gsLst>
-          <a:lin ang="5400000" scaled="0"/>
+          <a:lin ang="5400000"/>
         </a:gradFill>
         <a:gradFill rotWithShape="1">
           <a:gsLst>
@@ -7017,30 +7060,36 @@
               </a:schemeClr>
             </a:gs>
           </a:gsLst>
-          <a:lin ang="5400000" scaled="0"/>
+          <a:lin ang="5400000"/>
         </a:gradFill>
       </a:fillStyleLst>
       <a:lnStyleLst>
-        <a:ln w="6350" cap="flat" cmpd="sng" algn="ctr">
+        <a:ln w="6350" cap="flat">
           <a:solidFill>
             <a:schemeClr val="phClr"/>
           </a:solidFill>
           <a:prstDash val="solid"/>
-          <a:miter lim="800000"/>
+          <a:miter/>
+          <a:headEnd type="none"/>
+          <a:tailEnd type="none"/>
         </a:ln>
-        <a:ln w="12700" cap="flat" cmpd="sng" algn="ctr">
+        <a:ln w="12700" cap="flat">
           <a:solidFill>
             <a:schemeClr val="phClr"/>
           </a:solidFill>
           <a:prstDash val="solid"/>
-          <a:miter lim="800000"/>
+          <a:miter/>
+          <a:headEnd type="none"/>
+          <a:tailEnd type="none"/>
         </a:ln>
-        <a:ln w="19050" cap="flat" cmpd="sng" algn="ctr">
+        <a:ln w="19050" cap="flat">
           <a:solidFill>
             <a:schemeClr val="phClr"/>
           </a:solidFill>
           <a:prstDash val="solid"/>
-          <a:miter lim="800000"/>
+          <a:miter/>
+          <a:headEnd type="none"/>
+          <a:tailEnd type="none"/>
         </a:ln>
       </a:lnStyleLst>
       <a:effectStyleLst>
@@ -7095,17 +7144,12 @@
               </a:schemeClr>
             </a:gs>
           </a:gsLst>
-          <a:lin ang="5400000" scaled="0"/>
+          <a:lin ang="5400000"/>
         </a:gradFill>
       </a:bgFillStyleLst>
     </a:fmtScheme>
   </a:themeElements>
   <a:objectDefaults/>
   <a:extraClrSchemeLst/>
-  <a:extLst>
-    <a:ext uri="{05A4C25C-085E-4340-85A3-A5531E510DB2}">
-      <thm15:themeFamily xmlns:thm15="http://schemas.microsoft.com/office/thememl/2012/main" name="Office Theme" id="{62F939B6-93AF-4DB8-9C6B-D6C7DFDC589F}" vid="{4A3C46E8-61CC-4603-A589-7422A47A8E4A}"/>
-    </a:ext>
-  </a:extLst>
 </a:theme>
 </file>